--- a/docs/발표/presentation_version2.pptx
+++ b/docs/발표/presentation_version2.pptx
@@ -1248,106 +1248,6 @@
       </p:grpSpPr>
       <p:sp>
         <p:nvSpPr>
-          <p:cNvPr id="2" name="Shape 0"/>
-          <p:cNvSpPr/>
-          <p:nvPr/>
-        </p:nvSpPr>
-        <p:spPr>
-          <a:xfrm rot="-1690715">
-            <a:off x="11117759" y="671627"/>
-            <a:ext cx="377594" cy="23774"/>
-          </a:xfrm>
-          <a:prstGeom prst="rect">
-            <a:avLst/>
-          </a:prstGeom>
-          <a:solidFill>
-            <a:srgbClr val="1E2761"/>
-          </a:solidFill>
-          <a:ln/>
-        </p:spPr>
-      </p:sp>
-      <p:sp>
-        <p:nvSpPr>
-          <p:cNvPr id="3" name="Shape 1"/>
-          <p:cNvSpPr/>
-          <p:nvPr/>
-        </p:nvSpPr>
-        <p:spPr>
-          <a:xfrm rot="1690715">
-            <a:off x="11117759" y="849935"/>
-            <a:ext cx="377594" cy="23774"/>
-          </a:xfrm>
-          <a:prstGeom prst="rect">
-            <a:avLst/>
-          </a:prstGeom>
-          <a:solidFill>
-            <a:srgbClr val="1E2761"/>
-          </a:solidFill>
-          <a:ln/>
-        </p:spPr>
-      </p:sp>
-      <p:sp>
-        <p:nvSpPr>
-          <p:cNvPr id="4" name="Shape 2"/>
-          <p:cNvSpPr/>
-          <p:nvPr/>
-        </p:nvSpPr>
-        <p:spPr>
-          <a:xfrm>
-            <a:off x="11068812" y="701345"/>
-            <a:ext cx="142646" cy="142646"/>
-          </a:xfrm>
-          <a:prstGeom prst="ellipse">
-            <a:avLst/>
-          </a:prstGeom>
-          <a:solidFill>
-            <a:srgbClr val="1E2761"/>
-          </a:solidFill>
-          <a:ln/>
-        </p:spPr>
-      </p:sp>
-      <p:sp>
-        <p:nvSpPr>
-          <p:cNvPr id="5" name="Shape 3"/>
-          <p:cNvSpPr/>
-          <p:nvPr/>
-        </p:nvSpPr>
-        <p:spPr>
-          <a:xfrm>
-            <a:off x="11401654" y="523037"/>
-            <a:ext cx="142646" cy="142646"/>
-          </a:xfrm>
-          <a:prstGeom prst="ellipse">
-            <a:avLst/>
-          </a:prstGeom>
-          <a:solidFill>
-            <a:srgbClr val="E8574A"/>
-          </a:solidFill>
-          <a:ln/>
-        </p:spPr>
-      </p:sp>
-      <p:sp>
-        <p:nvSpPr>
-          <p:cNvPr id="6" name="Shape 4"/>
-          <p:cNvSpPr/>
-          <p:nvPr/>
-        </p:nvSpPr>
-        <p:spPr>
-          <a:xfrm>
-            <a:off x="11401654" y="879653"/>
-            <a:ext cx="142646" cy="142646"/>
-          </a:xfrm>
-          <a:prstGeom prst="ellipse">
-            <a:avLst/>
-          </a:prstGeom>
-          <a:solidFill>
-            <a:srgbClr val="2F9E63"/>
-          </a:solidFill>
-          <a:ln/>
-        </p:spPr>
-      </p:sp>
-      <p:sp>
-        <p:nvSpPr>
           <p:cNvPr id="7" name="Text 5"/>
           <p:cNvSpPr/>
           <p:nvPr/>
@@ -1702,6 +1602,430 @@
               <a:ea typeface="Calibri" panose="020F0502020204030204" pitchFamily="34" charset="0"/>
               <a:cs typeface="Calibri" panose="020F0502020204030204" pitchFamily="34" charset="0"/>
             </a:endParaRPr>
+          </a:p>
+        </p:txBody>
+      </p:sp>
+      <p:cxnSp>
+        <p:nvCxnSpPr>
+          <p:cNvPr id="13" name="graph-edge-develops"/>
+          <p:cNvCxnSpPr/>
+          <p:nvPr/>
+        </p:nvCxnSpPr>
+        <p:spPr>
+          <a:xfrm>
+            <a:off x="9939528" y="777240"/>
+            <a:ext cx="557784" cy="0"/>
+          </a:xfrm>
+          <a:prstGeom prst="line">
+            <a:avLst/>
+          </a:prstGeom>
+          <a:ln w="19050">
+            <a:solidFill>
+              <a:srgbClr val="CADCFC"/>
+            </a:solidFill>
+            <a:tailEnd type="triangle" w="sm" len="sm"/>
+          </a:ln>
+        </p:spPr>
+        <p:style>
+          <a:lnRef idx="2">
+            <a:schemeClr val="accent1"/>
+          </a:lnRef>
+          <a:fillRef idx="0">
+            <a:schemeClr val="accent1"/>
+          </a:fillRef>
+          <a:effectRef idx="1">
+            <a:schemeClr val="accent1"/>
+          </a:effectRef>
+          <a:fontRef idx="minor">
+            <a:schemeClr val="tx1"/>
+          </a:fontRef>
+        </p:style>
+      </p:cxnSp>
+      <p:cxnSp>
+        <p:nvCxnSpPr>
+          <p:cNvPr id="14" name="graph-edge-requires"/>
+          <p:cNvCxnSpPr/>
+          <p:nvPr/>
+        </p:nvCxnSpPr>
+        <p:spPr>
+          <a:xfrm flipH="1">
+            <a:off x="10716767" y="777240"/>
+            <a:ext cx="557785" cy="0"/>
+          </a:xfrm>
+          <a:prstGeom prst="line">
+            <a:avLst/>
+          </a:prstGeom>
+          <a:ln w="19050">
+            <a:solidFill>
+              <a:srgbClr val="2F9E63"/>
+            </a:solidFill>
+            <a:tailEnd type="triangle" w="sm" len="sm"/>
+          </a:ln>
+        </p:spPr>
+        <p:style>
+          <a:lnRef idx="2">
+            <a:schemeClr val="accent1"/>
+          </a:lnRef>
+          <a:fillRef idx="0">
+            <a:schemeClr val="accent1"/>
+          </a:fillRef>
+          <a:effectRef idx="1">
+            <a:schemeClr val="accent1"/>
+          </a:effectRef>
+          <a:fontRef idx="minor">
+            <a:schemeClr val="tx1"/>
+          </a:fontRef>
+        </p:style>
+      </p:cxnSp>
+      <p:cxnSp>
+        <p:nvCxnSpPr>
+          <p:cNvPr id="15" name="graph-edge-isa"/>
+          <p:cNvCxnSpPr/>
+          <p:nvPr/>
+        </p:nvCxnSpPr>
+        <p:spPr>
+          <a:xfrm flipV="1">
+            <a:off x="10607040" y="886968"/>
+            <a:ext cx="0" cy="402336"/>
+          </a:xfrm>
+          <a:prstGeom prst="line">
+            <a:avLst/>
+          </a:prstGeom>
+          <a:ln w="19050">
+            <a:solidFill>
+              <a:srgbClr val="9AA3B2"/>
+            </a:solidFill>
+            <a:tailEnd type="triangle" w="sm" len="sm"/>
+          </a:ln>
+        </p:spPr>
+        <p:style>
+          <a:lnRef idx="2">
+            <a:schemeClr val="accent1"/>
+          </a:lnRef>
+          <a:fillRef idx="0">
+            <a:schemeClr val="accent1"/>
+          </a:fillRef>
+          <a:effectRef idx="1">
+            <a:schemeClr val="accent1"/>
+          </a:effectRef>
+          <a:fontRef idx="minor">
+            <a:schemeClr val="tx1"/>
+          </a:fontRef>
+        </p:style>
+      </p:cxnSp>
+      <p:sp>
+        <p:nvSpPr>
+          <p:cNvPr id="16" name="graph-node-major"/>
+          <p:cNvSpPr/>
+          <p:nvPr/>
+        </p:nvSpPr>
+        <p:spPr>
+          <a:xfrm>
+            <a:off x="9738360" y="685800"/>
+            <a:ext cx="182880" cy="182880"/>
+          </a:xfrm>
+          <a:prstGeom prst="ellipse">
+            <a:avLst/>
+          </a:prstGeom>
+          <a:solidFill>
+            <a:srgbClr val="CADCFC"/>
+          </a:solidFill>
+          <a:ln>
+            <a:noFill/>
+          </a:ln>
+          <a:effectLst/>
+        </p:spPr>
+        <p:style>
+          <a:lnRef idx="1">
+            <a:schemeClr val="accent1"/>
+          </a:lnRef>
+          <a:fillRef idx="3">
+            <a:schemeClr val="accent1"/>
+          </a:fillRef>
+          <a:effectRef idx="2">
+            <a:schemeClr val="accent1"/>
+          </a:effectRef>
+          <a:fontRef idx="minor">
+            <a:schemeClr val="lt1"/>
+          </a:fontRef>
+        </p:style>
+        <p:txBody>
+          <a:bodyPr rtlCol="0" anchor="ctr"/>
+          <a:lstStyle/>
+          <a:p>
+            <a:pPr algn="ctr"/>
+          </a:p>
+        </p:txBody>
+      </p:sp>
+      <p:sp>
+        <p:nvSpPr>
+          <p:cNvPr id="17" name="graph-node-skill"/>
+          <p:cNvSpPr/>
+          <p:nvPr/>
+        </p:nvSpPr>
+        <p:spPr>
+          <a:xfrm>
+            <a:off x="10515600" y="685800"/>
+            <a:ext cx="182880" cy="182880"/>
+          </a:xfrm>
+          <a:prstGeom prst="ellipse">
+            <a:avLst/>
+          </a:prstGeom>
+          <a:solidFill>
+            <a:srgbClr val="E8574A"/>
+          </a:solidFill>
+          <a:ln>
+            <a:noFill/>
+          </a:ln>
+          <a:effectLst/>
+        </p:spPr>
+        <p:style>
+          <a:lnRef idx="1">
+            <a:schemeClr val="accent1"/>
+          </a:lnRef>
+          <a:fillRef idx="3">
+            <a:schemeClr val="accent1"/>
+          </a:fillRef>
+          <a:effectRef idx="2">
+            <a:schemeClr val="accent1"/>
+          </a:effectRef>
+          <a:fontRef idx="minor">
+            <a:schemeClr val="lt1"/>
+          </a:fontRef>
+        </p:style>
+        <p:txBody>
+          <a:bodyPr rtlCol="0" anchor="ctr"/>
+          <a:lstStyle/>
+          <a:p>
+            <a:pPr algn="ctr"/>
+          </a:p>
+        </p:txBody>
+      </p:sp>
+      <p:sp>
+        <p:nvSpPr>
+          <p:cNvPr id="18" name="graph-node-job"/>
+          <p:cNvSpPr/>
+          <p:nvPr/>
+        </p:nvSpPr>
+        <p:spPr>
+          <a:xfrm>
+            <a:off x="11292840" y="685800"/>
+            <a:ext cx="182880" cy="182880"/>
+          </a:xfrm>
+          <a:prstGeom prst="ellipse">
+            <a:avLst/>
+          </a:prstGeom>
+          <a:solidFill>
+            <a:srgbClr val="2F9E63"/>
+          </a:solidFill>
+          <a:ln>
+            <a:noFill/>
+          </a:ln>
+          <a:effectLst/>
+        </p:spPr>
+        <p:style>
+          <a:lnRef idx="1">
+            <a:schemeClr val="accent1"/>
+          </a:lnRef>
+          <a:fillRef idx="3">
+            <a:schemeClr val="accent1"/>
+          </a:fillRef>
+          <a:effectRef idx="2">
+            <a:schemeClr val="accent1"/>
+          </a:effectRef>
+          <a:fontRef idx="minor">
+            <a:schemeClr val="lt1"/>
+          </a:fontRef>
+        </p:style>
+        <p:txBody>
+          <a:bodyPr rtlCol="0" anchor="ctr"/>
+          <a:lstStyle/>
+          <a:p>
+            <a:pPr algn="ctr"/>
+          </a:p>
+        </p:txBody>
+      </p:sp>
+      <p:sp>
+        <p:nvSpPr>
+          <p:cNvPr id="19" name="graph-node-skill-child"/>
+          <p:cNvSpPr/>
+          <p:nvPr/>
+        </p:nvSpPr>
+        <p:spPr>
+          <a:xfrm>
+            <a:off x="10543032" y="1335024"/>
+            <a:ext cx="128015" cy="128015"/>
+          </a:xfrm>
+          <a:prstGeom prst="ellipse">
+            <a:avLst/>
+          </a:prstGeom>
+          <a:solidFill>
+            <a:srgbClr val="9AA3B2"/>
+          </a:solidFill>
+          <a:ln>
+            <a:noFill/>
+          </a:ln>
+          <a:effectLst/>
+        </p:spPr>
+        <p:style>
+          <a:lnRef idx="1">
+            <a:schemeClr val="accent1"/>
+          </a:lnRef>
+          <a:fillRef idx="3">
+            <a:schemeClr val="accent1"/>
+          </a:fillRef>
+          <a:effectRef idx="2">
+            <a:schemeClr val="accent1"/>
+          </a:effectRef>
+          <a:fontRef idx="minor">
+            <a:schemeClr val="lt1"/>
+          </a:fontRef>
+        </p:style>
+        <p:txBody>
+          <a:bodyPr rtlCol="0" anchor="ctr"/>
+          <a:lstStyle/>
+          <a:p>
+            <a:pPr algn="ctr"/>
+          </a:p>
+        </p:txBody>
+      </p:sp>
+      <p:sp>
+        <p:nvSpPr>
+          <p:cNvPr id="20" name="graph-label"/>
+          <p:cNvSpPr txBox="1"/>
+          <p:nvPr/>
+        </p:nvSpPr>
+        <p:spPr>
+          <a:xfrm>
+            <a:off x="9460611" y="914400"/>
+            <a:ext cx="738378" cy="228600"/>
+          </a:xfrm>
+          <a:prstGeom prst="rect">
+            <a:avLst/>
+          </a:prstGeom>
+          <a:noFill/>
+        </p:spPr>
+        <p:txBody>
+          <a:bodyPr wrap="none" lIns="0" rIns="0" tIns="0" bIns="0" anchor="t">
+            <a:spAutoFit/>
+          </a:bodyPr>
+          <a:lstStyle/>
+          <a:p>
+            <a:pPr algn="ctr"/>
+            <a:r>
+              <a:rPr sz="900" b="1">
+                <a:solidFill>
+                  <a:srgbClr val="D7DBEA"/>
+                </a:solidFill>
+                <a:latin typeface="Malgun Gothic"/>
+              </a:rPr>
+              <a:t>전공</a:t>
+            </a:r>
+          </a:p>
+        </p:txBody>
+      </p:sp>
+      <p:sp>
+        <p:nvSpPr>
+          <p:cNvPr id="21" name="graph-label"/>
+          <p:cNvSpPr txBox="1"/>
+          <p:nvPr/>
+        </p:nvSpPr>
+        <p:spPr>
+          <a:xfrm>
+            <a:off x="11015090" y="914400"/>
+            <a:ext cx="738378" cy="228600"/>
+          </a:xfrm>
+          <a:prstGeom prst="rect">
+            <a:avLst/>
+          </a:prstGeom>
+          <a:noFill/>
+        </p:spPr>
+        <p:txBody>
+          <a:bodyPr wrap="none" lIns="0" rIns="0" tIns="0" bIns="0" anchor="t">
+            <a:spAutoFit/>
+          </a:bodyPr>
+          <a:lstStyle/>
+          <a:p>
+            <a:pPr algn="ctr"/>
+            <a:r>
+              <a:rPr sz="900" b="1">
+                <a:solidFill>
+                  <a:srgbClr val="D7DBEA"/>
+                </a:solidFill>
+                <a:latin typeface="Malgun Gothic"/>
+              </a:rPr>
+              <a:t>직무</a:t>
+            </a:r>
+          </a:p>
+        </p:txBody>
+      </p:sp>
+      <p:sp>
+        <p:nvSpPr>
+          <p:cNvPr id="22" name="graph-label"/>
+          <p:cNvSpPr txBox="1"/>
+          <p:nvPr/>
+        </p:nvSpPr>
+        <p:spPr>
+          <a:xfrm>
+            <a:off x="10237851" y="466344"/>
+            <a:ext cx="738378" cy="228600"/>
+          </a:xfrm>
+          <a:prstGeom prst="rect">
+            <a:avLst/>
+          </a:prstGeom>
+          <a:noFill/>
+        </p:spPr>
+        <p:txBody>
+          <a:bodyPr wrap="none" lIns="0" rIns="0" tIns="0" bIns="0" anchor="t">
+            <a:spAutoFit/>
+          </a:bodyPr>
+          <a:lstStyle/>
+          <a:p>
+            <a:pPr algn="ctr"/>
+            <a:r>
+              <a:rPr sz="900" b="1">
+                <a:solidFill>
+                  <a:srgbClr val="D7DBEA"/>
+                </a:solidFill>
+                <a:latin typeface="Malgun Gothic"/>
+              </a:rPr>
+              <a:t>역량</a:t>
+            </a:r>
+          </a:p>
+        </p:txBody>
+      </p:sp>
+      <p:sp>
+        <p:nvSpPr>
+          <p:cNvPr id="23" name="graph-label"/>
+          <p:cNvSpPr txBox="1"/>
+          <p:nvPr/>
+        </p:nvSpPr>
+        <p:spPr>
+          <a:xfrm>
+            <a:off x="10698480" y="1307592"/>
+            <a:ext cx="738378" cy="228600"/>
+          </a:xfrm>
+          <a:prstGeom prst="rect">
+            <a:avLst/>
+          </a:prstGeom>
+          <a:noFill/>
+        </p:spPr>
+        <p:txBody>
+          <a:bodyPr wrap="none" lIns="0" rIns="0" tIns="0" bIns="0" anchor="t">
+            <a:spAutoFit/>
+          </a:bodyPr>
+          <a:lstStyle/>
+          <a:p>
+            <a:pPr algn="l"/>
+            <a:r>
+              <a:rPr sz="800" b="0">
+                <a:solidFill>
+                  <a:srgbClr val="D7DBEA"/>
+                </a:solidFill>
+                <a:latin typeface="Malgun Gothic"/>
+              </a:rPr>
+              <a:t>하위 역량</a:t>
+            </a:r>
           </a:p>
         </p:txBody>
       </p:sp>
@@ -1880,106 +2204,6 @@
       </p:sp>
       <p:sp>
         <p:nvSpPr>
-          <p:cNvPr id="5" name="Shape 3"/>
-          <p:cNvSpPr/>
-          <p:nvPr/>
-        </p:nvSpPr>
-        <p:spPr>
-          <a:xfrm rot="-1690715">
-            <a:off x="11397243" y="562356"/>
-            <a:ext cx="290457" cy="18288"/>
-          </a:xfrm>
-          <a:prstGeom prst="rect">
-            <a:avLst/>
-          </a:prstGeom>
-          <a:solidFill>
-            <a:srgbClr val="1E2761"/>
-          </a:solidFill>
-          <a:ln/>
-        </p:spPr>
-      </p:sp>
-      <p:sp>
-        <p:nvSpPr>
-          <p:cNvPr id="6" name="Shape 4"/>
-          <p:cNvSpPr/>
-          <p:nvPr/>
-        </p:nvSpPr>
-        <p:spPr>
-          <a:xfrm rot="1690715">
-            <a:off x="11397243" y="699516"/>
-            <a:ext cx="290457" cy="18288"/>
-          </a:xfrm>
-          <a:prstGeom prst="rect">
-            <a:avLst/>
-          </a:prstGeom>
-          <a:solidFill>
-            <a:srgbClr val="1E2761"/>
-          </a:solidFill>
-          <a:ln/>
-        </p:spPr>
-      </p:sp>
-      <p:sp>
-        <p:nvSpPr>
-          <p:cNvPr id="7" name="Shape 5"/>
-          <p:cNvSpPr/>
-          <p:nvPr/>
-        </p:nvSpPr>
-        <p:spPr>
-          <a:xfrm>
-            <a:off x="11359591" y="585216"/>
-            <a:ext cx="109728" cy="109728"/>
-          </a:xfrm>
-          <a:prstGeom prst="ellipse">
-            <a:avLst/>
-          </a:prstGeom>
-          <a:solidFill>
-            <a:srgbClr val="1E2761"/>
-          </a:solidFill>
-          <a:ln/>
-        </p:spPr>
-      </p:sp>
-      <p:sp>
-        <p:nvSpPr>
-          <p:cNvPr id="8" name="Shape 6"/>
-          <p:cNvSpPr/>
-          <p:nvPr/>
-        </p:nvSpPr>
-        <p:spPr>
-          <a:xfrm>
-            <a:off x="11615623" y="448056"/>
-            <a:ext cx="109728" cy="109728"/>
-          </a:xfrm>
-          <a:prstGeom prst="ellipse">
-            <a:avLst/>
-          </a:prstGeom>
-          <a:solidFill>
-            <a:srgbClr val="E8574A"/>
-          </a:solidFill>
-          <a:ln/>
-        </p:spPr>
-      </p:sp>
-      <p:sp>
-        <p:nvSpPr>
-          <p:cNvPr id="9" name="Shape 7"/>
-          <p:cNvSpPr/>
-          <p:nvPr/>
-        </p:nvSpPr>
-        <p:spPr>
-          <a:xfrm>
-            <a:off x="11615623" y="722376"/>
-            <a:ext cx="109728" cy="109728"/>
-          </a:xfrm>
-          <a:prstGeom prst="ellipse">
-            <a:avLst/>
-          </a:prstGeom>
-          <a:solidFill>
-            <a:srgbClr val="2F9E63"/>
-          </a:solidFill>
-          <a:ln/>
-        </p:spPr>
-      </p:sp>
-      <p:sp>
-        <p:nvSpPr>
           <p:cNvPr id="10" name="Shape 8"/>
           <p:cNvSpPr/>
           <p:nvPr/>
@@ -3398,6 +3622,290 @@
               <a:ea typeface="Calibri" panose="020F0502020204030204" pitchFamily="34" charset="0"/>
               <a:cs typeface="Calibri" panose="020F0502020204030204" pitchFamily="34" charset="0"/>
             </a:endParaRPr>
+          </a:p>
+        </p:txBody>
+      </p:sp>
+      <p:cxnSp>
+        <p:nvCxnSpPr>
+          <p:cNvPr id="46" name="graph-edge-develops"/>
+          <p:cNvCxnSpPr/>
+          <p:nvPr/>
+        </p:nvCxnSpPr>
+        <p:spPr>
+          <a:xfrm>
+            <a:off x="11000232" y="530352"/>
+            <a:ext cx="219456" cy="0"/>
+          </a:xfrm>
+          <a:prstGeom prst="line">
+            <a:avLst/>
+          </a:prstGeom>
+          <a:ln w="12700">
+            <a:solidFill>
+              <a:srgbClr val="1E2761"/>
+            </a:solidFill>
+            <a:tailEnd type="triangle" w="sm" len="sm"/>
+          </a:ln>
+        </p:spPr>
+        <p:style>
+          <a:lnRef idx="2">
+            <a:schemeClr val="accent1"/>
+          </a:lnRef>
+          <a:fillRef idx="0">
+            <a:schemeClr val="accent1"/>
+          </a:fillRef>
+          <a:effectRef idx="1">
+            <a:schemeClr val="accent1"/>
+          </a:effectRef>
+          <a:fontRef idx="minor">
+            <a:schemeClr val="tx1"/>
+          </a:fontRef>
+        </p:style>
+      </p:cxnSp>
+      <p:cxnSp>
+        <p:nvCxnSpPr>
+          <p:cNvPr id="47" name="graph-edge-requires"/>
+          <p:cNvCxnSpPr/>
+          <p:nvPr/>
+        </p:nvCxnSpPr>
+        <p:spPr>
+          <a:xfrm flipH="1">
+            <a:off x="11365992" y="530352"/>
+            <a:ext cx="219456" cy="0"/>
+          </a:xfrm>
+          <a:prstGeom prst="line">
+            <a:avLst/>
+          </a:prstGeom>
+          <a:ln w="12700">
+            <a:solidFill>
+              <a:srgbClr val="2F9E63"/>
+            </a:solidFill>
+            <a:tailEnd type="triangle" w="sm" len="sm"/>
+          </a:ln>
+        </p:spPr>
+        <p:style>
+          <a:lnRef idx="2">
+            <a:schemeClr val="accent1"/>
+          </a:lnRef>
+          <a:fillRef idx="0">
+            <a:schemeClr val="accent1"/>
+          </a:fillRef>
+          <a:effectRef idx="1">
+            <a:schemeClr val="accent1"/>
+          </a:effectRef>
+          <a:fontRef idx="minor">
+            <a:schemeClr val="tx1"/>
+          </a:fontRef>
+        </p:style>
+      </p:cxnSp>
+      <p:cxnSp>
+        <p:nvCxnSpPr>
+          <p:cNvPr id="48" name="graph-edge-isa"/>
+          <p:cNvCxnSpPr/>
+          <p:nvPr/>
+        </p:nvCxnSpPr>
+        <p:spPr>
+          <a:xfrm flipV="1">
+            <a:off x="11292840" y="603503"/>
+            <a:ext cx="0" cy="146305"/>
+          </a:xfrm>
+          <a:prstGeom prst="line">
+            <a:avLst/>
+          </a:prstGeom>
+          <a:ln w="12700">
+            <a:solidFill>
+              <a:srgbClr val="9AA3B2"/>
+            </a:solidFill>
+            <a:tailEnd type="triangle" w="sm" len="sm"/>
+          </a:ln>
+        </p:spPr>
+        <p:style>
+          <a:lnRef idx="2">
+            <a:schemeClr val="accent1"/>
+          </a:lnRef>
+          <a:fillRef idx="0">
+            <a:schemeClr val="accent1"/>
+          </a:fillRef>
+          <a:effectRef idx="1">
+            <a:schemeClr val="accent1"/>
+          </a:effectRef>
+          <a:fontRef idx="minor">
+            <a:schemeClr val="tx1"/>
+          </a:fontRef>
+        </p:style>
+      </p:cxnSp>
+      <p:sp>
+        <p:nvSpPr>
+          <p:cNvPr id="49" name="graph-node-major"/>
+          <p:cNvSpPr/>
+          <p:nvPr/>
+        </p:nvSpPr>
+        <p:spPr>
+          <a:xfrm>
+            <a:off x="10872215" y="475488"/>
+            <a:ext cx="109728" cy="109728"/>
+          </a:xfrm>
+          <a:prstGeom prst="ellipse">
+            <a:avLst/>
+          </a:prstGeom>
+          <a:solidFill>
+            <a:srgbClr val="1E2761"/>
+          </a:solidFill>
+          <a:ln>
+            <a:noFill/>
+          </a:ln>
+          <a:effectLst/>
+        </p:spPr>
+        <p:style>
+          <a:lnRef idx="1">
+            <a:schemeClr val="accent1"/>
+          </a:lnRef>
+          <a:fillRef idx="3">
+            <a:schemeClr val="accent1"/>
+          </a:fillRef>
+          <a:effectRef idx="2">
+            <a:schemeClr val="accent1"/>
+          </a:effectRef>
+          <a:fontRef idx="minor">
+            <a:schemeClr val="lt1"/>
+          </a:fontRef>
+        </p:style>
+        <p:txBody>
+          <a:bodyPr rtlCol="0" anchor="ctr"/>
+          <a:lstStyle/>
+          <a:p>
+            <a:pPr algn="ctr"/>
+          </a:p>
+        </p:txBody>
+      </p:sp>
+      <p:sp>
+        <p:nvSpPr>
+          <p:cNvPr id="50" name="graph-node-skill"/>
+          <p:cNvSpPr/>
+          <p:nvPr/>
+        </p:nvSpPr>
+        <p:spPr>
+          <a:xfrm>
+            <a:off x="11237976" y="475488"/>
+            <a:ext cx="109728" cy="109728"/>
+          </a:xfrm>
+          <a:prstGeom prst="ellipse">
+            <a:avLst/>
+          </a:prstGeom>
+          <a:solidFill>
+            <a:srgbClr val="E8574A"/>
+          </a:solidFill>
+          <a:ln>
+            <a:noFill/>
+          </a:ln>
+          <a:effectLst/>
+        </p:spPr>
+        <p:style>
+          <a:lnRef idx="1">
+            <a:schemeClr val="accent1"/>
+          </a:lnRef>
+          <a:fillRef idx="3">
+            <a:schemeClr val="accent1"/>
+          </a:fillRef>
+          <a:effectRef idx="2">
+            <a:schemeClr val="accent1"/>
+          </a:effectRef>
+          <a:fontRef idx="minor">
+            <a:schemeClr val="lt1"/>
+          </a:fontRef>
+        </p:style>
+        <p:txBody>
+          <a:bodyPr rtlCol="0" anchor="ctr"/>
+          <a:lstStyle/>
+          <a:p>
+            <a:pPr algn="ctr"/>
+          </a:p>
+        </p:txBody>
+      </p:sp>
+      <p:sp>
+        <p:nvSpPr>
+          <p:cNvPr id="51" name="graph-node-job"/>
+          <p:cNvSpPr/>
+          <p:nvPr/>
+        </p:nvSpPr>
+        <p:spPr>
+          <a:xfrm>
+            <a:off x="11603736" y="475488"/>
+            <a:ext cx="109728" cy="109728"/>
+          </a:xfrm>
+          <a:prstGeom prst="ellipse">
+            <a:avLst/>
+          </a:prstGeom>
+          <a:solidFill>
+            <a:srgbClr val="2F9E63"/>
+          </a:solidFill>
+          <a:ln>
+            <a:noFill/>
+          </a:ln>
+          <a:effectLst/>
+        </p:spPr>
+        <p:style>
+          <a:lnRef idx="1">
+            <a:schemeClr val="accent1"/>
+          </a:lnRef>
+          <a:fillRef idx="3">
+            <a:schemeClr val="accent1"/>
+          </a:fillRef>
+          <a:effectRef idx="2">
+            <a:schemeClr val="accent1"/>
+          </a:effectRef>
+          <a:fontRef idx="minor">
+            <a:schemeClr val="lt1"/>
+          </a:fontRef>
+        </p:style>
+        <p:txBody>
+          <a:bodyPr rtlCol="0" anchor="ctr"/>
+          <a:lstStyle/>
+          <a:p>
+            <a:pPr algn="ctr"/>
+          </a:p>
+        </p:txBody>
+      </p:sp>
+      <p:sp>
+        <p:nvSpPr>
+          <p:cNvPr id="52" name="graph-node-skill-child"/>
+          <p:cNvSpPr/>
+          <p:nvPr/>
+        </p:nvSpPr>
+        <p:spPr>
+          <a:xfrm>
+            <a:off x="11254435" y="784555"/>
+            <a:ext cx="76809" cy="76809"/>
+          </a:xfrm>
+          <a:prstGeom prst="ellipse">
+            <a:avLst/>
+          </a:prstGeom>
+          <a:solidFill>
+            <a:srgbClr val="9AA3B2"/>
+          </a:solidFill>
+          <a:ln>
+            <a:noFill/>
+          </a:ln>
+          <a:effectLst/>
+        </p:spPr>
+        <p:style>
+          <a:lnRef idx="1">
+            <a:schemeClr val="accent1"/>
+          </a:lnRef>
+          <a:fillRef idx="3">
+            <a:schemeClr val="accent1"/>
+          </a:fillRef>
+          <a:effectRef idx="2">
+            <a:schemeClr val="accent1"/>
+          </a:effectRef>
+          <a:fontRef idx="minor">
+            <a:schemeClr val="lt1"/>
+          </a:fontRef>
+        </p:style>
+        <p:txBody>
+          <a:bodyPr rtlCol="0" anchor="ctr"/>
+          <a:lstStyle/>
+          <a:p>
+            <a:pPr algn="ctr"/>
           </a:p>
         </p:txBody>
       </p:sp>
@@ -3607,146 +4115,6 @@
       </p:sp>
       <p:sp>
         <p:nvSpPr>
-          <p:cNvPr id="4" name="타원 3">
-            <a:extLst>
-              <a:ext uri="{FF2B5EF4-FFF2-40B4-BE49-F238E27FC236}">
-                <a16:creationId xmlns:a16="http://schemas.microsoft.com/office/drawing/2014/main" id="{58D7CE8A-E7D7-4A9B-AA96-BADB7AEFB0D5}"/>
-              </a:ext>
-            </a:extLst>
-          </p:cNvPr>
-          <p:cNvSpPr>
-            <a:spLocks noGrp="1"/>
-          </p:cNvSpPr>
-          <p:nvPr/>
-        </p:nvSpPr>
-        <p:spPr>
-          <a:xfrm>
-            <a:off x="11359515" y="584835"/>
-            <a:ext cx="110490" cy="110490"/>
-          </a:xfrm>
-          <a:prstGeom prst="ellipse">
-            <a:avLst/>
-          </a:prstGeom>
-          <a:solidFill>
-            <a:srgbClr val="1E2761"/>
-          </a:solidFill>
-          <a:ln w="0">
-            <a:noFill/>
-          </a:ln>
-        </p:spPr>
-      </p:sp>
-      <p:sp>
-        <p:nvSpPr>
-          <p:cNvPr id="5" name="타원 4">
-            <a:extLst>
-              <a:ext uri="{FF2B5EF4-FFF2-40B4-BE49-F238E27FC236}">
-                <a16:creationId xmlns:a16="http://schemas.microsoft.com/office/drawing/2014/main" id="{512A740A-C0DD-4400-BB28-E28A18212473}"/>
-              </a:ext>
-            </a:extLst>
-          </p:cNvPr>
-          <p:cNvSpPr>
-            <a:spLocks noGrp="1"/>
-          </p:cNvSpPr>
-          <p:nvPr/>
-        </p:nvSpPr>
-        <p:spPr>
-          <a:xfrm>
-            <a:off x="11615738" y="447675"/>
-            <a:ext cx="110490" cy="110490"/>
-          </a:xfrm>
-          <a:prstGeom prst="ellipse">
-            <a:avLst/>
-          </a:prstGeom>
-          <a:solidFill>
-            <a:srgbClr val="E8574A"/>
-          </a:solidFill>
-          <a:ln w="0">
-            <a:noFill/>
-          </a:ln>
-        </p:spPr>
-      </p:sp>
-      <p:sp>
-        <p:nvSpPr>
-          <p:cNvPr id="6" name="타원 5">
-            <a:extLst>
-              <a:ext uri="{FF2B5EF4-FFF2-40B4-BE49-F238E27FC236}">
-                <a16:creationId xmlns:a16="http://schemas.microsoft.com/office/drawing/2014/main" id="{4478CF81-1F84-4BB0-AF08-73C483B74464}"/>
-              </a:ext>
-            </a:extLst>
-          </p:cNvPr>
-          <p:cNvSpPr>
-            <a:spLocks noGrp="1"/>
-          </p:cNvSpPr>
-          <p:nvPr/>
-        </p:nvSpPr>
-        <p:spPr>
-          <a:xfrm>
-            <a:off x="11615738" y="721995"/>
-            <a:ext cx="110490" cy="110490"/>
-          </a:xfrm>
-          <a:prstGeom prst="ellipse">
-            <a:avLst/>
-          </a:prstGeom>
-          <a:solidFill>
-            <a:srgbClr val="2FA36B"/>
-          </a:solidFill>
-          <a:ln w="0">
-            <a:noFill/>
-          </a:ln>
-        </p:spPr>
-      </p:sp>
-      <p:cxnSp>
-        <p:nvCxnSpPr>
-          <p:cNvPr id="58" name="직선 화살표 연결선 57"/>
-          <p:cNvCxnSpPr>
-            <a:stCxn id="4" idx="6"/>
-            <a:endCxn id="5" idx="2"/>
-          </p:cNvCxnSpPr>
-          <p:nvPr/>
-        </p:nvCxnSpPr>
-        <p:spPr>
-          <a:xfrm flipV="1">
-            <a:off x="11470005" y="502920"/>
-            <a:ext cx="145733" cy="137160"/>
-          </a:xfrm>
-          <a:prstGeom prst="straightConnector1">
-            <a:avLst/>
-          </a:prstGeom>
-          <a:ln w="19050">
-            <a:solidFill>
-              <a:srgbClr val="1E2761"/>
-            </a:solidFill>
-            <a:prstDash val="solid"/>
-          </a:ln>
-        </p:spPr>
-      </p:cxnSp>
-      <p:cxnSp>
-        <p:nvCxnSpPr>
-          <p:cNvPr id="59" name="직선 화살표 연결선 58"/>
-          <p:cNvCxnSpPr>
-            <a:stCxn id="4" idx="6"/>
-            <a:endCxn id="6" idx="2"/>
-          </p:cNvCxnSpPr>
-          <p:nvPr/>
-        </p:nvCxnSpPr>
-        <p:spPr>
-          <a:xfrm>
-            <a:off x="11470005" y="640080"/>
-            <a:ext cx="145733" cy="137160"/>
-          </a:xfrm>
-          <a:prstGeom prst="straightConnector1">
-            <a:avLst/>
-          </a:prstGeom>
-          <a:ln w="19050">
-            <a:solidFill>
-              <a:srgbClr val="1E2761"/>
-            </a:solidFill>
-            <a:prstDash val="solid"/>
-          </a:ln>
-        </p:spPr>
-      </p:cxnSp>
-      <p:sp>
-        <p:nvSpPr>
           <p:cNvPr id="9" name="사각형: 둥근 모서리 8">
             <a:extLst>
               <a:ext uri="{FF2B5EF4-FFF2-40B4-BE49-F238E27FC236}">
@@ -6341,6 +6709,290 @@
               </a:rPr>
               <a:t>3</a:t>
             </a:r>
+          </a:p>
+        </p:txBody>
+      </p:sp>
+      <p:cxnSp>
+        <p:nvCxnSpPr>
+          <p:cNvPr id="96" name="graph-edge-develops"/>
+          <p:cNvCxnSpPr/>
+          <p:nvPr/>
+        </p:nvCxnSpPr>
+        <p:spPr>
+          <a:xfrm>
+            <a:off x="11000232" y="530352"/>
+            <a:ext cx="219456" cy="0"/>
+          </a:xfrm>
+          <a:prstGeom prst="line">
+            <a:avLst/>
+          </a:prstGeom>
+          <a:ln w="12700">
+            <a:solidFill>
+              <a:srgbClr val="1E2761"/>
+            </a:solidFill>
+            <a:tailEnd type="triangle" w="sm" len="sm"/>
+          </a:ln>
+        </p:spPr>
+        <p:style>
+          <a:lnRef idx="2">
+            <a:schemeClr val="accent1"/>
+          </a:lnRef>
+          <a:fillRef idx="0">
+            <a:schemeClr val="accent1"/>
+          </a:fillRef>
+          <a:effectRef idx="1">
+            <a:schemeClr val="accent1"/>
+          </a:effectRef>
+          <a:fontRef idx="minor">
+            <a:schemeClr val="tx1"/>
+          </a:fontRef>
+        </p:style>
+      </p:cxnSp>
+      <p:cxnSp>
+        <p:nvCxnSpPr>
+          <p:cNvPr id="97" name="graph-edge-requires"/>
+          <p:cNvCxnSpPr/>
+          <p:nvPr/>
+        </p:nvCxnSpPr>
+        <p:spPr>
+          <a:xfrm flipH="1">
+            <a:off x="11365992" y="530352"/>
+            <a:ext cx="219456" cy="0"/>
+          </a:xfrm>
+          <a:prstGeom prst="line">
+            <a:avLst/>
+          </a:prstGeom>
+          <a:ln w="12700">
+            <a:solidFill>
+              <a:srgbClr val="2F9E63"/>
+            </a:solidFill>
+            <a:tailEnd type="triangle" w="sm" len="sm"/>
+          </a:ln>
+        </p:spPr>
+        <p:style>
+          <a:lnRef idx="2">
+            <a:schemeClr val="accent1"/>
+          </a:lnRef>
+          <a:fillRef idx="0">
+            <a:schemeClr val="accent1"/>
+          </a:fillRef>
+          <a:effectRef idx="1">
+            <a:schemeClr val="accent1"/>
+          </a:effectRef>
+          <a:fontRef idx="minor">
+            <a:schemeClr val="tx1"/>
+          </a:fontRef>
+        </p:style>
+      </p:cxnSp>
+      <p:cxnSp>
+        <p:nvCxnSpPr>
+          <p:cNvPr id="98" name="graph-edge-isa"/>
+          <p:cNvCxnSpPr/>
+          <p:nvPr/>
+        </p:nvCxnSpPr>
+        <p:spPr>
+          <a:xfrm flipV="1">
+            <a:off x="11292840" y="603503"/>
+            <a:ext cx="0" cy="146305"/>
+          </a:xfrm>
+          <a:prstGeom prst="line">
+            <a:avLst/>
+          </a:prstGeom>
+          <a:ln w="12700">
+            <a:solidFill>
+              <a:srgbClr val="9AA3B2"/>
+            </a:solidFill>
+            <a:tailEnd type="triangle" w="sm" len="sm"/>
+          </a:ln>
+        </p:spPr>
+        <p:style>
+          <a:lnRef idx="2">
+            <a:schemeClr val="accent1"/>
+          </a:lnRef>
+          <a:fillRef idx="0">
+            <a:schemeClr val="accent1"/>
+          </a:fillRef>
+          <a:effectRef idx="1">
+            <a:schemeClr val="accent1"/>
+          </a:effectRef>
+          <a:fontRef idx="minor">
+            <a:schemeClr val="tx1"/>
+          </a:fontRef>
+        </p:style>
+      </p:cxnSp>
+      <p:sp>
+        <p:nvSpPr>
+          <p:cNvPr id="99" name="graph-node-major"/>
+          <p:cNvSpPr/>
+          <p:nvPr/>
+        </p:nvSpPr>
+        <p:spPr>
+          <a:xfrm>
+            <a:off x="10872215" y="475488"/>
+            <a:ext cx="109728" cy="109728"/>
+          </a:xfrm>
+          <a:prstGeom prst="ellipse">
+            <a:avLst/>
+          </a:prstGeom>
+          <a:solidFill>
+            <a:srgbClr val="1E2761"/>
+          </a:solidFill>
+          <a:ln>
+            <a:noFill/>
+          </a:ln>
+          <a:effectLst/>
+        </p:spPr>
+        <p:style>
+          <a:lnRef idx="1">
+            <a:schemeClr val="accent1"/>
+          </a:lnRef>
+          <a:fillRef idx="3">
+            <a:schemeClr val="accent1"/>
+          </a:fillRef>
+          <a:effectRef idx="2">
+            <a:schemeClr val="accent1"/>
+          </a:effectRef>
+          <a:fontRef idx="minor">
+            <a:schemeClr val="lt1"/>
+          </a:fontRef>
+        </p:style>
+        <p:txBody>
+          <a:bodyPr rtlCol="0" anchor="ctr"/>
+          <a:lstStyle/>
+          <a:p>
+            <a:pPr algn="ctr"/>
+          </a:p>
+        </p:txBody>
+      </p:sp>
+      <p:sp>
+        <p:nvSpPr>
+          <p:cNvPr id="100" name="graph-node-skill"/>
+          <p:cNvSpPr/>
+          <p:nvPr/>
+        </p:nvSpPr>
+        <p:spPr>
+          <a:xfrm>
+            <a:off x="11237976" y="475488"/>
+            <a:ext cx="109728" cy="109728"/>
+          </a:xfrm>
+          <a:prstGeom prst="ellipse">
+            <a:avLst/>
+          </a:prstGeom>
+          <a:solidFill>
+            <a:srgbClr val="E8574A"/>
+          </a:solidFill>
+          <a:ln>
+            <a:noFill/>
+          </a:ln>
+          <a:effectLst/>
+        </p:spPr>
+        <p:style>
+          <a:lnRef idx="1">
+            <a:schemeClr val="accent1"/>
+          </a:lnRef>
+          <a:fillRef idx="3">
+            <a:schemeClr val="accent1"/>
+          </a:fillRef>
+          <a:effectRef idx="2">
+            <a:schemeClr val="accent1"/>
+          </a:effectRef>
+          <a:fontRef idx="minor">
+            <a:schemeClr val="lt1"/>
+          </a:fontRef>
+        </p:style>
+        <p:txBody>
+          <a:bodyPr rtlCol="0" anchor="ctr"/>
+          <a:lstStyle/>
+          <a:p>
+            <a:pPr algn="ctr"/>
+          </a:p>
+        </p:txBody>
+      </p:sp>
+      <p:sp>
+        <p:nvSpPr>
+          <p:cNvPr id="101" name="graph-node-job"/>
+          <p:cNvSpPr/>
+          <p:nvPr/>
+        </p:nvSpPr>
+        <p:spPr>
+          <a:xfrm>
+            <a:off x="11603736" y="475488"/>
+            <a:ext cx="109728" cy="109728"/>
+          </a:xfrm>
+          <a:prstGeom prst="ellipse">
+            <a:avLst/>
+          </a:prstGeom>
+          <a:solidFill>
+            <a:srgbClr val="2F9E63"/>
+          </a:solidFill>
+          <a:ln>
+            <a:noFill/>
+          </a:ln>
+          <a:effectLst/>
+        </p:spPr>
+        <p:style>
+          <a:lnRef idx="1">
+            <a:schemeClr val="accent1"/>
+          </a:lnRef>
+          <a:fillRef idx="3">
+            <a:schemeClr val="accent1"/>
+          </a:fillRef>
+          <a:effectRef idx="2">
+            <a:schemeClr val="accent1"/>
+          </a:effectRef>
+          <a:fontRef idx="minor">
+            <a:schemeClr val="lt1"/>
+          </a:fontRef>
+        </p:style>
+        <p:txBody>
+          <a:bodyPr rtlCol="0" anchor="ctr"/>
+          <a:lstStyle/>
+          <a:p>
+            <a:pPr algn="ctr"/>
+          </a:p>
+        </p:txBody>
+      </p:sp>
+      <p:sp>
+        <p:nvSpPr>
+          <p:cNvPr id="102" name="graph-node-skill-child"/>
+          <p:cNvSpPr/>
+          <p:nvPr/>
+        </p:nvSpPr>
+        <p:spPr>
+          <a:xfrm>
+            <a:off x="11254435" y="784555"/>
+            <a:ext cx="76809" cy="76809"/>
+          </a:xfrm>
+          <a:prstGeom prst="ellipse">
+            <a:avLst/>
+          </a:prstGeom>
+          <a:solidFill>
+            <a:srgbClr val="9AA3B2"/>
+          </a:solidFill>
+          <a:ln>
+            <a:noFill/>
+          </a:ln>
+          <a:effectLst/>
+        </p:spPr>
+        <p:style>
+          <a:lnRef idx="1">
+            <a:schemeClr val="accent1"/>
+          </a:lnRef>
+          <a:fillRef idx="3">
+            <a:schemeClr val="accent1"/>
+          </a:fillRef>
+          <a:effectRef idx="2">
+            <a:schemeClr val="accent1"/>
+          </a:effectRef>
+          <a:fontRef idx="minor">
+            <a:schemeClr val="lt1"/>
+          </a:fontRef>
+        </p:style>
+        <p:txBody>
+          <a:bodyPr rtlCol="0" anchor="ctr"/>
+          <a:lstStyle/>
+          <a:p>
+            <a:pPr algn="ctr"/>
           </a:p>
         </p:txBody>
       </p:sp>
@@ -6513,106 +7165,6 @@
       </p:sp>
       <p:sp>
         <p:nvSpPr>
-          <p:cNvPr id="5" name="Shape 3"/>
-          <p:cNvSpPr/>
-          <p:nvPr/>
-        </p:nvSpPr>
-        <p:spPr>
-          <a:xfrm rot="-1690715">
-            <a:off x="11397243" y="562356"/>
-            <a:ext cx="290457" cy="18288"/>
-          </a:xfrm>
-          <a:prstGeom prst="rect">
-            <a:avLst/>
-          </a:prstGeom>
-          <a:solidFill>
-            <a:srgbClr val="1E2761"/>
-          </a:solidFill>
-          <a:ln/>
-        </p:spPr>
-      </p:sp>
-      <p:sp>
-        <p:nvSpPr>
-          <p:cNvPr id="6" name="Shape 4"/>
-          <p:cNvSpPr/>
-          <p:nvPr/>
-        </p:nvSpPr>
-        <p:spPr>
-          <a:xfrm rot="1690715">
-            <a:off x="11397243" y="699516"/>
-            <a:ext cx="290457" cy="18288"/>
-          </a:xfrm>
-          <a:prstGeom prst="rect">
-            <a:avLst/>
-          </a:prstGeom>
-          <a:solidFill>
-            <a:srgbClr val="1E2761"/>
-          </a:solidFill>
-          <a:ln/>
-        </p:spPr>
-      </p:sp>
-      <p:sp>
-        <p:nvSpPr>
-          <p:cNvPr id="7" name="Shape 5"/>
-          <p:cNvSpPr/>
-          <p:nvPr/>
-        </p:nvSpPr>
-        <p:spPr>
-          <a:xfrm>
-            <a:off x="11359591" y="585216"/>
-            <a:ext cx="109728" cy="109728"/>
-          </a:xfrm>
-          <a:prstGeom prst="ellipse">
-            <a:avLst/>
-          </a:prstGeom>
-          <a:solidFill>
-            <a:srgbClr val="1E2761"/>
-          </a:solidFill>
-          <a:ln/>
-        </p:spPr>
-      </p:sp>
-      <p:sp>
-        <p:nvSpPr>
-          <p:cNvPr id="8" name="Shape 6"/>
-          <p:cNvSpPr/>
-          <p:nvPr/>
-        </p:nvSpPr>
-        <p:spPr>
-          <a:xfrm>
-            <a:off x="11615623" y="448056"/>
-            <a:ext cx="109728" cy="109728"/>
-          </a:xfrm>
-          <a:prstGeom prst="ellipse">
-            <a:avLst/>
-          </a:prstGeom>
-          <a:solidFill>
-            <a:srgbClr val="E8574A"/>
-          </a:solidFill>
-          <a:ln/>
-        </p:spPr>
-      </p:sp>
-      <p:sp>
-        <p:nvSpPr>
-          <p:cNvPr id="9" name="Shape 7"/>
-          <p:cNvSpPr/>
-          <p:nvPr/>
-        </p:nvSpPr>
-        <p:spPr>
-          <a:xfrm>
-            <a:off x="11615623" y="722376"/>
-            <a:ext cx="109728" cy="109728"/>
-          </a:xfrm>
-          <a:prstGeom prst="ellipse">
-            <a:avLst/>
-          </a:prstGeom>
-          <a:solidFill>
-            <a:srgbClr val="2F9E63"/>
-          </a:solidFill>
-          <a:ln/>
-        </p:spPr>
-      </p:sp>
-      <p:sp>
-        <p:nvSpPr>
           <p:cNvPr id="10" name="Shape 8"/>
           <p:cNvSpPr/>
           <p:nvPr/>
@@ -7772,6 +8324,290 @@
               <a:ea typeface="Calibri" panose="020F0502020204030204" pitchFamily="34" charset="0"/>
               <a:cs typeface="Calibri" panose="020F0502020204030204" pitchFamily="34" charset="0"/>
             </a:endParaRPr>
+          </a:p>
+        </p:txBody>
+      </p:sp>
+      <p:cxnSp>
+        <p:nvCxnSpPr>
+          <p:cNvPr id="40" name="graph-edge-develops"/>
+          <p:cNvCxnSpPr/>
+          <p:nvPr/>
+        </p:nvCxnSpPr>
+        <p:spPr>
+          <a:xfrm>
+            <a:off x="11000232" y="530352"/>
+            <a:ext cx="219456" cy="0"/>
+          </a:xfrm>
+          <a:prstGeom prst="line">
+            <a:avLst/>
+          </a:prstGeom>
+          <a:ln w="12700">
+            <a:solidFill>
+              <a:srgbClr val="1E2761"/>
+            </a:solidFill>
+            <a:tailEnd type="triangle" w="sm" len="sm"/>
+          </a:ln>
+        </p:spPr>
+        <p:style>
+          <a:lnRef idx="2">
+            <a:schemeClr val="accent1"/>
+          </a:lnRef>
+          <a:fillRef idx="0">
+            <a:schemeClr val="accent1"/>
+          </a:fillRef>
+          <a:effectRef idx="1">
+            <a:schemeClr val="accent1"/>
+          </a:effectRef>
+          <a:fontRef idx="minor">
+            <a:schemeClr val="tx1"/>
+          </a:fontRef>
+        </p:style>
+      </p:cxnSp>
+      <p:cxnSp>
+        <p:nvCxnSpPr>
+          <p:cNvPr id="41" name="graph-edge-requires"/>
+          <p:cNvCxnSpPr/>
+          <p:nvPr/>
+        </p:nvCxnSpPr>
+        <p:spPr>
+          <a:xfrm flipH="1">
+            <a:off x="11365992" y="530352"/>
+            <a:ext cx="219456" cy="0"/>
+          </a:xfrm>
+          <a:prstGeom prst="line">
+            <a:avLst/>
+          </a:prstGeom>
+          <a:ln w="12700">
+            <a:solidFill>
+              <a:srgbClr val="2F9E63"/>
+            </a:solidFill>
+            <a:tailEnd type="triangle" w="sm" len="sm"/>
+          </a:ln>
+        </p:spPr>
+        <p:style>
+          <a:lnRef idx="2">
+            <a:schemeClr val="accent1"/>
+          </a:lnRef>
+          <a:fillRef idx="0">
+            <a:schemeClr val="accent1"/>
+          </a:fillRef>
+          <a:effectRef idx="1">
+            <a:schemeClr val="accent1"/>
+          </a:effectRef>
+          <a:fontRef idx="minor">
+            <a:schemeClr val="tx1"/>
+          </a:fontRef>
+        </p:style>
+      </p:cxnSp>
+      <p:cxnSp>
+        <p:nvCxnSpPr>
+          <p:cNvPr id="42" name="graph-edge-isa"/>
+          <p:cNvCxnSpPr/>
+          <p:nvPr/>
+        </p:nvCxnSpPr>
+        <p:spPr>
+          <a:xfrm flipV="1">
+            <a:off x="11292840" y="603503"/>
+            <a:ext cx="0" cy="146305"/>
+          </a:xfrm>
+          <a:prstGeom prst="line">
+            <a:avLst/>
+          </a:prstGeom>
+          <a:ln w="12700">
+            <a:solidFill>
+              <a:srgbClr val="9AA3B2"/>
+            </a:solidFill>
+            <a:tailEnd type="triangle" w="sm" len="sm"/>
+          </a:ln>
+        </p:spPr>
+        <p:style>
+          <a:lnRef idx="2">
+            <a:schemeClr val="accent1"/>
+          </a:lnRef>
+          <a:fillRef idx="0">
+            <a:schemeClr val="accent1"/>
+          </a:fillRef>
+          <a:effectRef idx="1">
+            <a:schemeClr val="accent1"/>
+          </a:effectRef>
+          <a:fontRef idx="minor">
+            <a:schemeClr val="tx1"/>
+          </a:fontRef>
+        </p:style>
+      </p:cxnSp>
+      <p:sp>
+        <p:nvSpPr>
+          <p:cNvPr id="43" name="graph-node-major"/>
+          <p:cNvSpPr/>
+          <p:nvPr/>
+        </p:nvSpPr>
+        <p:spPr>
+          <a:xfrm>
+            <a:off x="10872215" y="475488"/>
+            <a:ext cx="109728" cy="109728"/>
+          </a:xfrm>
+          <a:prstGeom prst="ellipse">
+            <a:avLst/>
+          </a:prstGeom>
+          <a:solidFill>
+            <a:srgbClr val="1E2761"/>
+          </a:solidFill>
+          <a:ln>
+            <a:noFill/>
+          </a:ln>
+          <a:effectLst/>
+        </p:spPr>
+        <p:style>
+          <a:lnRef idx="1">
+            <a:schemeClr val="accent1"/>
+          </a:lnRef>
+          <a:fillRef idx="3">
+            <a:schemeClr val="accent1"/>
+          </a:fillRef>
+          <a:effectRef idx="2">
+            <a:schemeClr val="accent1"/>
+          </a:effectRef>
+          <a:fontRef idx="minor">
+            <a:schemeClr val="lt1"/>
+          </a:fontRef>
+        </p:style>
+        <p:txBody>
+          <a:bodyPr rtlCol="0" anchor="ctr"/>
+          <a:lstStyle/>
+          <a:p>
+            <a:pPr algn="ctr"/>
+          </a:p>
+        </p:txBody>
+      </p:sp>
+      <p:sp>
+        <p:nvSpPr>
+          <p:cNvPr id="44" name="graph-node-skill"/>
+          <p:cNvSpPr/>
+          <p:nvPr/>
+        </p:nvSpPr>
+        <p:spPr>
+          <a:xfrm>
+            <a:off x="11237976" y="475488"/>
+            <a:ext cx="109728" cy="109728"/>
+          </a:xfrm>
+          <a:prstGeom prst="ellipse">
+            <a:avLst/>
+          </a:prstGeom>
+          <a:solidFill>
+            <a:srgbClr val="E8574A"/>
+          </a:solidFill>
+          <a:ln>
+            <a:noFill/>
+          </a:ln>
+          <a:effectLst/>
+        </p:spPr>
+        <p:style>
+          <a:lnRef idx="1">
+            <a:schemeClr val="accent1"/>
+          </a:lnRef>
+          <a:fillRef idx="3">
+            <a:schemeClr val="accent1"/>
+          </a:fillRef>
+          <a:effectRef idx="2">
+            <a:schemeClr val="accent1"/>
+          </a:effectRef>
+          <a:fontRef idx="minor">
+            <a:schemeClr val="lt1"/>
+          </a:fontRef>
+        </p:style>
+        <p:txBody>
+          <a:bodyPr rtlCol="0" anchor="ctr"/>
+          <a:lstStyle/>
+          <a:p>
+            <a:pPr algn="ctr"/>
+          </a:p>
+        </p:txBody>
+      </p:sp>
+      <p:sp>
+        <p:nvSpPr>
+          <p:cNvPr id="45" name="graph-node-job"/>
+          <p:cNvSpPr/>
+          <p:nvPr/>
+        </p:nvSpPr>
+        <p:spPr>
+          <a:xfrm>
+            <a:off x="11603736" y="475488"/>
+            <a:ext cx="109728" cy="109728"/>
+          </a:xfrm>
+          <a:prstGeom prst="ellipse">
+            <a:avLst/>
+          </a:prstGeom>
+          <a:solidFill>
+            <a:srgbClr val="2F9E63"/>
+          </a:solidFill>
+          <a:ln>
+            <a:noFill/>
+          </a:ln>
+          <a:effectLst/>
+        </p:spPr>
+        <p:style>
+          <a:lnRef idx="1">
+            <a:schemeClr val="accent1"/>
+          </a:lnRef>
+          <a:fillRef idx="3">
+            <a:schemeClr val="accent1"/>
+          </a:fillRef>
+          <a:effectRef idx="2">
+            <a:schemeClr val="accent1"/>
+          </a:effectRef>
+          <a:fontRef idx="minor">
+            <a:schemeClr val="lt1"/>
+          </a:fontRef>
+        </p:style>
+        <p:txBody>
+          <a:bodyPr rtlCol="0" anchor="ctr"/>
+          <a:lstStyle/>
+          <a:p>
+            <a:pPr algn="ctr"/>
+          </a:p>
+        </p:txBody>
+      </p:sp>
+      <p:sp>
+        <p:nvSpPr>
+          <p:cNvPr id="46" name="graph-node-skill-child"/>
+          <p:cNvSpPr/>
+          <p:nvPr/>
+        </p:nvSpPr>
+        <p:spPr>
+          <a:xfrm>
+            <a:off x="11254435" y="784555"/>
+            <a:ext cx="76809" cy="76809"/>
+          </a:xfrm>
+          <a:prstGeom prst="ellipse">
+            <a:avLst/>
+          </a:prstGeom>
+          <a:solidFill>
+            <a:srgbClr val="9AA3B2"/>
+          </a:solidFill>
+          <a:ln>
+            <a:noFill/>
+          </a:ln>
+          <a:effectLst/>
+        </p:spPr>
+        <p:style>
+          <a:lnRef idx="1">
+            <a:schemeClr val="accent1"/>
+          </a:lnRef>
+          <a:fillRef idx="3">
+            <a:schemeClr val="accent1"/>
+          </a:fillRef>
+          <a:effectRef idx="2">
+            <a:schemeClr val="accent1"/>
+          </a:effectRef>
+          <a:fontRef idx="minor">
+            <a:schemeClr val="lt1"/>
+          </a:fontRef>
+        </p:style>
+        <p:txBody>
+          <a:bodyPr rtlCol="0" anchor="ctr"/>
+          <a:lstStyle/>
+          <a:p>
+            <a:pPr algn="ctr"/>
           </a:p>
         </p:txBody>
       </p:sp>
@@ -7939,106 +8775,6 @@
       </p:sp>
       <p:sp>
         <p:nvSpPr>
-          <p:cNvPr id="5" name="Shape 3"/>
-          <p:cNvSpPr/>
-          <p:nvPr/>
-        </p:nvSpPr>
-        <p:spPr>
-          <a:xfrm rot="-1690715">
-            <a:off x="11397243" y="562356"/>
-            <a:ext cx="290457" cy="18288"/>
-          </a:xfrm>
-          <a:prstGeom prst="rect">
-            <a:avLst/>
-          </a:prstGeom>
-          <a:solidFill>
-            <a:srgbClr val="1E2761"/>
-          </a:solidFill>
-          <a:ln/>
-        </p:spPr>
-      </p:sp>
-      <p:sp>
-        <p:nvSpPr>
-          <p:cNvPr id="6" name="Shape 4"/>
-          <p:cNvSpPr/>
-          <p:nvPr/>
-        </p:nvSpPr>
-        <p:spPr>
-          <a:xfrm rot="1690715">
-            <a:off x="11397243" y="699516"/>
-            <a:ext cx="290457" cy="18288"/>
-          </a:xfrm>
-          <a:prstGeom prst="rect">
-            <a:avLst/>
-          </a:prstGeom>
-          <a:solidFill>
-            <a:srgbClr val="1E2761"/>
-          </a:solidFill>
-          <a:ln/>
-        </p:spPr>
-      </p:sp>
-      <p:sp>
-        <p:nvSpPr>
-          <p:cNvPr id="7" name="Shape 5"/>
-          <p:cNvSpPr/>
-          <p:nvPr/>
-        </p:nvSpPr>
-        <p:spPr>
-          <a:xfrm>
-            <a:off x="11359591" y="585216"/>
-            <a:ext cx="109728" cy="109728"/>
-          </a:xfrm>
-          <a:prstGeom prst="ellipse">
-            <a:avLst/>
-          </a:prstGeom>
-          <a:solidFill>
-            <a:srgbClr val="1E2761"/>
-          </a:solidFill>
-          <a:ln/>
-        </p:spPr>
-      </p:sp>
-      <p:sp>
-        <p:nvSpPr>
-          <p:cNvPr id="8" name="Shape 6"/>
-          <p:cNvSpPr/>
-          <p:nvPr/>
-        </p:nvSpPr>
-        <p:spPr>
-          <a:xfrm>
-            <a:off x="11615623" y="448056"/>
-            <a:ext cx="109728" cy="109728"/>
-          </a:xfrm>
-          <a:prstGeom prst="ellipse">
-            <a:avLst/>
-          </a:prstGeom>
-          <a:solidFill>
-            <a:srgbClr val="E8574A"/>
-          </a:solidFill>
-          <a:ln/>
-        </p:spPr>
-      </p:sp>
-      <p:sp>
-        <p:nvSpPr>
-          <p:cNvPr id="9" name="Shape 7"/>
-          <p:cNvSpPr/>
-          <p:nvPr/>
-        </p:nvSpPr>
-        <p:spPr>
-          <a:xfrm>
-            <a:off x="11615623" y="722376"/>
-            <a:ext cx="109728" cy="109728"/>
-          </a:xfrm>
-          <a:prstGeom prst="ellipse">
-            <a:avLst/>
-          </a:prstGeom>
-          <a:solidFill>
-            <a:srgbClr val="2F9E63"/>
-          </a:solidFill>
-          <a:ln/>
-        </p:spPr>
-      </p:sp>
-      <p:sp>
-        <p:nvSpPr>
           <p:cNvPr id="10" name="Shape 8"/>
           <p:cNvSpPr/>
           <p:nvPr/>
@@ -9319,6 +10055,290 @@
               <a:ea typeface="Calibri" panose="020F0502020204030204" pitchFamily="34" charset="0"/>
               <a:cs typeface="Calibri" panose="020F0502020204030204" pitchFamily="34" charset="0"/>
             </a:endParaRPr>
+          </a:p>
+        </p:txBody>
+      </p:sp>
+      <p:cxnSp>
+        <p:nvCxnSpPr>
+          <p:cNvPr id="47" name="graph-edge-develops"/>
+          <p:cNvCxnSpPr/>
+          <p:nvPr/>
+        </p:nvCxnSpPr>
+        <p:spPr>
+          <a:xfrm>
+            <a:off x="11000232" y="530352"/>
+            <a:ext cx="219456" cy="0"/>
+          </a:xfrm>
+          <a:prstGeom prst="line">
+            <a:avLst/>
+          </a:prstGeom>
+          <a:ln w="12700">
+            <a:solidFill>
+              <a:srgbClr val="1E2761"/>
+            </a:solidFill>
+            <a:tailEnd type="triangle" w="sm" len="sm"/>
+          </a:ln>
+        </p:spPr>
+        <p:style>
+          <a:lnRef idx="2">
+            <a:schemeClr val="accent1"/>
+          </a:lnRef>
+          <a:fillRef idx="0">
+            <a:schemeClr val="accent1"/>
+          </a:fillRef>
+          <a:effectRef idx="1">
+            <a:schemeClr val="accent1"/>
+          </a:effectRef>
+          <a:fontRef idx="minor">
+            <a:schemeClr val="tx1"/>
+          </a:fontRef>
+        </p:style>
+      </p:cxnSp>
+      <p:cxnSp>
+        <p:nvCxnSpPr>
+          <p:cNvPr id="48" name="graph-edge-requires"/>
+          <p:cNvCxnSpPr/>
+          <p:nvPr/>
+        </p:nvCxnSpPr>
+        <p:spPr>
+          <a:xfrm flipH="1">
+            <a:off x="11365992" y="530352"/>
+            <a:ext cx="219456" cy="0"/>
+          </a:xfrm>
+          <a:prstGeom prst="line">
+            <a:avLst/>
+          </a:prstGeom>
+          <a:ln w="12700">
+            <a:solidFill>
+              <a:srgbClr val="2F9E63"/>
+            </a:solidFill>
+            <a:tailEnd type="triangle" w="sm" len="sm"/>
+          </a:ln>
+        </p:spPr>
+        <p:style>
+          <a:lnRef idx="2">
+            <a:schemeClr val="accent1"/>
+          </a:lnRef>
+          <a:fillRef idx="0">
+            <a:schemeClr val="accent1"/>
+          </a:fillRef>
+          <a:effectRef idx="1">
+            <a:schemeClr val="accent1"/>
+          </a:effectRef>
+          <a:fontRef idx="minor">
+            <a:schemeClr val="tx1"/>
+          </a:fontRef>
+        </p:style>
+      </p:cxnSp>
+      <p:cxnSp>
+        <p:nvCxnSpPr>
+          <p:cNvPr id="49" name="graph-edge-isa"/>
+          <p:cNvCxnSpPr/>
+          <p:nvPr/>
+        </p:nvCxnSpPr>
+        <p:spPr>
+          <a:xfrm flipV="1">
+            <a:off x="11292840" y="603503"/>
+            <a:ext cx="0" cy="146305"/>
+          </a:xfrm>
+          <a:prstGeom prst="line">
+            <a:avLst/>
+          </a:prstGeom>
+          <a:ln w="12700">
+            <a:solidFill>
+              <a:srgbClr val="9AA3B2"/>
+            </a:solidFill>
+            <a:tailEnd type="triangle" w="sm" len="sm"/>
+          </a:ln>
+        </p:spPr>
+        <p:style>
+          <a:lnRef idx="2">
+            <a:schemeClr val="accent1"/>
+          </a:lnRef>
+          <a:fillRef idx="0">
+            <a:schemeClr val="accent1"/>
+          </a:fillRef>
+          <a:effectRef idx="1">
+            <a:schemeClr val="accent1"/>
+          </a:effectRef>
+          <a:fontRef idx="minor">
+            <a:schemeClr val="tx1"/>
+          </a:fontRef>
+        </p:style>
+      </p:cxnSp>
+      <p:sp>
+        <p:nvSpPr>
+          <p:cNvPr id="50" name="graph-node-major"/>
+          <p:cNvSpPr/>
+          <p:nvPr/>
+        </p:nvSpPr>
+        <p:spPr>
+          <a:xfrm>
+            <a:off x="10872215" y="475488"/>
+            <a:ext cx="109728" cy="109728"/>
+          </a:xfrm>
+          <a:prstGeom prst="ellipse">
+            <a:avLst/>
+          </a:prstGeom>
+          <a:solidFill>
+            <a:srgbClr val="1E2761"/>
+          </a:solidFill>
+          <a:ln>
+            <a:noFill/>
+          </a:ln>
+          <a:effectLst/>
+        </p:spPr>
+        <p:style>
+          <a:lnRef idx="1">
+            <a:schemeClr val="accent1"/>
+          </a:lnRef>
+          <a:fillRef idx="3">
+            <a:schemeClr val="accent1"/>
+          </a:fillRef>
+          <a:effectRef idx="2">
+            <a:schemeClr val="accent1"/>
+          </a:effectRef>
+          <a:fontRef idx="minor">
+            <a:schemeClr val="lt1"/>
+          </a:fontRef>
+        </p:style>
+        <p:txBody>
+          <a:bodyPr rtlCol="0" anchor="ctr"/>
+          <a:lstStyle/>
+          <a:p>
+            <a:pPr algn="ctr"/>
+          </a:p>
+        </p:txBody>
+      </p:sp>
+      <p:sp>
+        <p:nvSpPr>
+          <p:cNvPr id="51" name="graph-node-skill"/>
+          <p:cNvSpPr/>
+          <p:nvPr/>
+        </p:nvSpPr>
+        <p:spPr>
+          <a:xfrm>
+            <a:off x="11237976" y="475488"/>
+            <a:ext cx="109728" cy="109728"/>
+          </a:xfrm>
+          <a:prstGeom prst="ellipse">
+            <a:avLst/>
+          </a:prstGeom>
+          <a:solidFill>
+            <a:srgbClr val="E8574A"/>
+          </a:solidFill>
+          <a:ln>
+            <a:noFill/>
+          </a:ln>
+          <a:effectLst/>
+        </p:spPr>
+        <p:style>
+          <a:lnRef idx="1">
+            <a:schemeClr val="accent1"/>
+          </a:lnRef>
+          <a:fillRef idx="3">
+            <a:schemeClr val="accent1"/>
+          </a:fillRef>
+          <a:effectRef idx="2">
+            <a:schemeClr val="accent1"/>
+          </a:effectRef>
+          <a:fontRef idx="minor">
+            <a:schemeClr val="lt1"/>
+          </a:fontRef>
+        </p:style>
+        <p:txBody>
+          <a:bodyPr rtlCol="0" anchor="ctr"/>
+          <a:lstStyle/>
+          <a:p>
+            <a:pPr algn="ctr"/>
+          </a:p>
+        </p:txBody>
+      </p:sp>
+      <p:sp>
+        <p:nvSpPr>
+          <p:cNvPr id="52" name="graph-node-job"/>
+          <p:cNvSpPr/>
+          <p:nvPr/>
+        </p:nvSpPr>
+        <p:spPr>
+          <a:xfrm>
+            <a:off x="11603736" y="475488"/>
+            <a:ext cx="109728" cy="109728"/>
+          </a:xfrm>
+          <a:prstGeom prst="ellipse">
+            <a:avLst/>
+          </a:prstGeom>
+          <a:solidFill>
+            <a:srgbClr val="2F9E63"/>
+          </a:solidFill>
+          <a:ln>
+            <a:noFill/>
+          </a:ln>
+          <a:effectLst/>
+        </p:spPr>
+        <p:style>
+          <a:lnRef idx="1">
+            <a:schemeClr val="accent1"/>
+          </a:lnRef>
+          <a:fillRef idx="3">
+            <a:schemeClr val="accent1"/>
+          </a:fillRef>
+          <a:effectRef idx="2">
+            <a:schemeClr val="accent1"/>
+          </a:effectRef>
+          <a:fontRef idx="minor">
+            <a:schemeClr val="lt1"/>
+          </a:fontRef>
+        </p:style>
+        <p:txBody>
+          <a:bodyPr rtlCol="0" anchor="ctr"/>
+          <a:lstStyle/>
+          <a:p>
+            <a:pPr algn="ctr"/>
+          </a:p>
+        </p:txBody>
+      </p:sp>
+      <p:sp>
+        <p:nvSpPr>
+          <p:cNvPr id="53" name="graph-node-skill-child"/>
+          <p:cNvSpPr/>
+          <p:nvPr/>
+        </p:nvSpPr>
+        <p:spPr>
+          <a:xfrm>
+            <a:off x="11254435" y="784555"/>
+            <a:ext cx="76809" cy="76809"/>
+          </a:xfrm>
+          <a:prstGeom prst="ellipse">
+            <a:avLst/>
+          </a:prstGeom>
+          <a:solidFill>
+            <a:srgbClr val="9AA3B2"/>
+          </a:solidFill>
+          <a:ln>
+            <a:noFill/>
+          </a:ln>
+          <a:effectLst/>
+        </p:spPr>
+        <p:style>
+          <a:lnRef idx="1">
+            <a:schemeClr val="accent1"/>
+          </a:lnRef>
+          <a:fillRef idx="3">
+            <a:schemeClr val="accent1"/>
+          </a:fillRef>
+          <a:effectRef idx="2">
+            <a:schemeClr val="accent1"/>
+          </a:effectRef>
+          <a:fontRef idx="minor">
+            <a:schemeClr val="lt1"/>
+          </a:fontRef>
+        </p:style>
+        <p:txBody>
+          <a:bodyPr rtlCol="0" anchor="ctr"/>
+          <a:lstStyle/>
+          <a:p>
+            <a:pPr algn="ctr"/>
           </a:p>
         </p:txBody>
       </p:sp>
@@ -9486,106 +10506,6 @@
       </p:sp>
       <p:sp>
         <p:nvSpPr>
-          <p:cNvPr id="5" name="Shape 3"/>
-          <p:cNvSpPr/>
-          <p:nvPr/>
-        </p:nvSpPr>
-        <p:spPr>
-          <a:xfrm rot="-1690715">
-            <a:off x="11397243" y="562356"/>
-            <a:ext cx="290457" cy="18288"/>
-          </a:xfrm>
-          <a:prstGeom prst="rect">
-            <a:avLst/>
-          </a:prstGeom>
-          <a:solidFill>
-            <a:srgbClr val="1E2761"/>
-          </a:solidFill>
-          <a:ln/>
-        </p:spPr>
-      </p:sp>
-      <p:sp>
-        <p:nvSpPr>
-          <p:cNvPr id="6" name="Shape 4"/>
-          <p:cNvSpPr/>
-          <p:nvPr/>
-        </p:nvSpPr>
-        <p:spPr>
-          <a:xfrm rot="1690715">
-            <a:off x="11397243" y="699516"/>
-            <a:ext cx="290457" cy="18288"/>
-          </a:xfrm>
-          <a:prstGeom prst="rect">
-            <a:avLst/>
-          </a:prstGeom>
-          <a:solidFill>
-            <a:srgbClr val="1E2761"/>
-          </a:solidFill>
-          <a:ln/>
-        </p:spPr>
-      </p:sp>
-      <p:sp>
-        <p:nvSpPr>
-          <p:cNvPr id="7" name="Shape 5"/>
-          <p:cNvSpPr/>
-          <p:nvPr/>
-        </p:nvSpPr>
-        <p:spPr>
-          <a:xfrm>
-            <a:off x="11359591" y="585216"/>
-            <a:ext cx="109728" cy="109728"/>
-          </a:xfrm>
-          <a:prstGeom prst="ellipse">
-            <a:avLst/>
-          </a:prstGeom>
-          <a:solidFill>
-            <a:srgbClr val="1E2761"/>
-          </a:solidFill>
-          <a:ln/>
-        </p:spPr>
-      </p:sp>
-      <p:sp>
-        <p:nvSpPr>
-          <p:cNvPr id="8" name="Shape 6"/>
-          <p:cNvSpPr/>
-          <p:nvPr/>
-        </p:nvSpPr>
-        <p:spPr>
-          <a:xfrm>
-            <a:off x="11615623" y="448056"/>
-            <a:ext cx="109728" cy="109728"/>
-          </a:xfrm>
-          <a:prstGeom prst="ellipse">
-            <a:avLst/>
-          </a:prstGeom>
-          <a:solidFill>
-            <a:srgbClr val="E8574A"/>
-          </a:solidFill>
-          <a:ln/>
-        </p:spPr>
-      </p:sp>
-      <p:sp>
-        <p:nvSpPr>
-          <p:cNvPr id="9" name="Shape 7"/>
-          <p:cNvSpPr/>
-          <p:nvPr/>
-        </p:nvSpPr>
-        <p:spPr>
-          <a:xfrm>
-            <a:off x="11615623" y="722376"/>
-            <a:ext cx="109728" cy="109728"/>
-          </a:xfrm>
-          <a:prstGeom prst="ellipse">
-            <a:avLst/>
-          </a:prstGeom>
-          <a:solidFill>
-            <a:srgbClr val="2F9E63"/>
-          </a:solidFill>
-          <a:ln/>
-        </p:spPr>
-      </p:sp>
-      <p:sp>
-        <p:nvSpPr>
           <p:cNvPr id="27" name="Text 25"/>
           <p:cNvSpPr/>
           <p:nvPr/>
@@ -12038,6 +12958,290 @@
               </a:rPr>
               <a:t>)</a:t>
             </a:r>
+          </a:p>
+        </p:txBody>
+      </p:sp>
+      <p:cxnSp>
+        <p:nvCxnSpPr>
+          <p:cNvPr id="50" name="graph-edge-develops"/>
+          <p:cNvCxnSpPr/>
+          <p:nvPr/>
+        </p:nvCxnSpPr>
+        <p:spPr>
+          <a:xfrm>
+            <a:off x="11000232" y="530352"/>
+            <a:ext cx="219456" cy="0"/>
+          </a:xfrm>
+          <a:prstGeom prst="line">
+            <a:avLst/>
+          </a:prstGeom>
+          <a:ln w="12700">
+            <a:solidFill>
+              <a:srgbClr val="1E2761"/>
+            </a:solidFill>
+            <a:tailEnd type="triangle" w="sm" len="sm"/>
+          </a:ln>
+        </p:spPr>
+        <p:style>
+          <a:lnRef idx="2">
+            <a:schemeClr val="accent1"/>
+          </a:lnRef>
+          <a:fillRef idx="0">
+            <a:schemeClr val="accent1"/>
+          </a:fillRef>
+          <a:effectRef idx="1">
+            <a:schemeClr val="accent1"/>
+          </a:effectRef>
+          <a:fontRef idx="minor">
+            <a:schemeClr val="tx1"/>
+          </a:fontRef>
+        </p:style>
+      </p:cxnSp>
+      <p:cxnSp>
+        <p:nvCxnSpPr>
+          <p:cNvPr id="51" name="graph-edge-requires"/>
+          <p:cNvCxnSpPr/>
+          <p:nvPr/>
+        </p:nvCxnSpPr>
+        <p:spPr>
+          <a:xfrm flipH="1">
+            <a:off x="11365992" y="530352"/>
+            <a:ext cx="219456" cy="0"/>
+          </a:xfrm>
+          <a:prstGeom prst="line">
+            <a:avLst/>
+          </a:prstGeom>
+          <a:ln w="12700">
+            <a:solidFill>
+              <a:srgbClr val="2F9E63"/>
+            </a:solidFill>
+            <a:tailEnd type="triangle" w="sm" len="sm"/>
+          </a:ln>
+        </p:spPr>
+        <p:style>
+          <a:lnRef idx="2">
+            <a:schemeClr val="accent1"/>
+          </a:lnRef>
+          <a:fillRef idx="0">
+            <a:schemeClr val="accent1"/>
+          </a:fillRef>
+          <a:effectRef idx="1">
+            <a:schemeClr val="accent1"/>
+          </a:effectRef>
+          <a:fontRef idx="minor">
+            <a:schemeClr val="tx1"/>
+          </a:fontRef>
+        </p:style>
+      </p:cxnSp>
+      <p:cxnSp>
+        <p:nvCxnSpPr>
+          <p:cNvPr id="52" name="graph-edge-isa"/>
+          <p:cNvCxnSpPr/>
+          <p:nvPr/>
+        </p:nvCxnSpPr>
+        <p:spPr>
+          <a:xfrm flipV="1">
+            <a:off x="11292840" y="603503"/>
+            <a:ext cx="0" cy="146305"/>
+          </a:xfrm>
+          <a:prstGeom prst="line">
+            <a:avLst/>
+          </a:prstGeom>
+          <a:ln w="12700">
+            <a:solidFill>
+              <a:srgbClr val="9AA3B2"/>
+            </a:solidFill>
+            <a:tailEnd type="triangle" w="sm" len="sm"/>
+          </a:ln>
+        </p:spPr>
+        <p:style>
+          <a:lnRef idx="2">
+            <a:schemeClr val="accent1"/>
+          </a:lnRef>
+          <a:fillRef idx="0">
+            <a:schemeClr val="accent1"/>
+          </a:fillRef>
+          <a:effectRef idx="1">
+            <a:schemeClr val="accent1"/>
+          </a:effectRef>
+          <a:fontRef idx="minor">
+            <a:schemeClr val="tx1"/>
+          </a:fontRef>
+        </p:style>
+      </p:cxnSp>
+      <p:sp>
+        <p:nvSpPr>
+          <p:cNvPr id="53" name="graph-node-major"/>
+          <p:cNvSpPr/>
+          <p:nvPr/>
+        </p:nvSpPr>
+        <p:spPr>
+          <a:xfrm>
+            <a:off x="10872215" y="475488"/>
+            <a:ext cx="109728" cy="109728"/>
+          </a:xfrm>
+          <a:prstGeom prst="ellipse">
+            <a:avLst/>
+          </a:prstGeom>
+          <a:solidFill>
+            <a:srgbClr val="1E2761"/>
+          </a:solidFill>
+          <a:ln>
+            <a:noFill/>
+          </a:ln>
+          <a:effectLst/>
+        </p:spPr>
+        <p:style>
+          <a:lnRef idx="1">
+            <a:schemeClr val="accent1"/>
+          </a:lnRef>
+          <a:fillRef idx="3">
+            <a:schemeClr val="accent1"/>
+          </a:fillRef>
+          <a:effectRef idx="2">
+            <a:schemeClr val="accent1"/>
+          </a:effectRef>
+          <a:fontRef idx="minor">
+            <a:schemeClr val="lt1"/>
+          </a:fontRef>
+        </p:style>
+        <p:txBody>
+          <a:bodyPr rtlCol="0" anchor="ctr"/>
+          <a:lstStyle/>
+          <a:p>
+            <a:pPr algn="ctr"/>
+          </a:p>
+        </p:txBody>
+      </p:sp>
+      <p:sp>
+        <p:nvSpPr>
+          <p:cNvPr id="54" name="graph-node-skill"/>
+          <p:cNvSpPr/>
+          <p:nvPr/>
+        </p:nvSpPr>
+        <p:spPr>
+          <a:xfrm>
+            <a:off x="11237976" y="475488"/>
+            <a:ext cx="109728" cy="109728"/>
+          </a:xfrm>
+          <a:prstGeom prst="ellipse">
+            <a:avLst/>
+          </a:prstGeom>
+          <a:solidFill>
+            <a:srgbClr val="E8574A"/>
+          </a:solidFill>
+          <a:ln>
+            <a:noFill/>
+          </a:ln>
+          <a:effectLst/>
+        </p:spPr>
+        <p:style>
+          <a:lnRef idx="1">
+            <a:schemeClr val="accent1"/>
+          </a:lnRef>
+          <a:fillRef idx="3">
+            <a:schemeClr val="accent1"/>
+          </a:fillRef>
+          <a:effectRef idx="2">
+            <a:schemeClr val="accent1"/>
+          </a:effectRef>
+          <a:fontRef idx="minor">
+            <a:schemeClr val="lt1"/>
+          </a:fontRef>
+        </p:style>
+        <p:txBody>
+          <a:bodyPr rtlCol="0" anchor="ctr"/>
+          <a:lstStyle/>
+          <a:p>
+            <a:pPr algn="ctr"/>
+          </a:p>
+        </p:txBody>
+      </p:sp>
+      <p:sp>
+        <p:nvSpPr>
+          <p:cNvPr id="55" name="graph-node-job"/>
+          <p:cNvSpPr/>
+          <p:nvPr/>
+        </p:nvSpPr>
+        <p:spPr>
+          <a:xfrm>
+            <a:off x="11603736" y="475488"/>
+            <a:ext cx="109728" cy="109728"/>
+          </a:xfrm>
+          <a:prstGeom prst="ellipse">
+            <a:avLst/>
+          </a:prstGeom>
+          <a:solidFill>
+            <a:srgbClr val="2F9E63"/>
+          </a:solidFill>
+          <a:ln>
+            <a:noFill/>
+          </a:ln>
+          <a:effectLst/>
+        </p:spPr>
+        <p:style>
+          <a:lnRef idx="1">
+            <a:schemeClr val="accent1"/>
+          </a:lnRef>
+          <a:fillRef idx="3">
+            <a:schemeClr val="accent1"/>
+          </a:fillRef>
+          <a:effectRef idx="2">
+            <a:schemeClr val="accent1"/>
+          </a:effectRef>
+          <a:fontRef idx="minor">
+            <a:schemeClr val="lt1"/>
+          </a:fontRef>
+        </p:style>
+        <p:txBody>
+          <a:bodyPr rtlCol="0" anchor="ctr"/>
+          <a:lstStyle/>
+          <a:p>
+            <a:pPr algn="ctr"/>
+          </a:p>
+        </p:txBody>
+      </p:sp>
+      <p:sp>
+        <p:nvSpPr>
+          <p:cNvPr id="56" name="graph-node-skill-child"/>
+          <p:cNvSpPr/>
+          <p:nvPr/>
+        </p:nvSpPr>
+        <p:spPr>
+          <a:xfrm>
+            <a:off x="11254435" y="784555"/>
+            <a:ext cx="76809" cy="76809"/>
+          </a:xfrm>
+          <a:prstGeom prst="ellipse">
+            <a:avLst/>
+          </a:prstGeom>
+          <a:solidFill>
+            <a:srgbClr val="9AA3B2"/>
+          </a:solidFill>
+          <a:ln>
+            <a:noFill/>
+          </a:ln>
+          <a:effectLst/>
+        </p:spPr>
+        <p:style>
+          <a:lnRef idx="1">
+            <a:schemeClr val="accent1"/>
+          </a:lnRef>
+          <a:fillRef idx="3">
+            <a:schemeClr val="accent1"/>
+          </a:fillRef>
+          <a:effectRef idx="2">
+            <a:schemeClr val="accent1"/>
+          </a:effectRef>
+          <a:fontRef idx="minor">
+            <a:schemeClr val="lt1"/>
+          </a:fontRef>
+        </p:style>
+        <p:txBody>
+          <a:bodyPr rtlCol="0" anchor="ctr"/>
+          <a:lstStyle/>
+          <a:p>
+            <a:pPr algn="ctr"/>
           </a:p>
         </p:txBody>
       </p:sp>
@@ -12205,106 +13409,6 @@
       </p:sp>
       <p:sp>
         <p:nvSpPr>
-          <p:cNvPr id="5" name="Shape 3"/>
-          <p:cNvSpPr/>
-          <p:nvPr/>
-        </p:nvSpPr>
-        <p:spPr>
-          <a:xfrm rot="-1690715">
-            <a:off x="11397243" y="562356"/>
-            <a:ext cx="290457" cy="18288"/>
-          </a:xfrm>
-          <a:prstGeom prst="rect">
-            <a:avLst/>
-          </a:prstGeom>
-          <a:solidFill>
-            <a:srgbClr val="1E2761"/>
-          </a:solidFill>
-          <a:ln/>
-        </p:spPr>
-      </p:sp>
-      <p:sp>
-        <p:nvSpPr>
-          <p:cNvPr id="6" name="Shape 4"/>
-          <p:cNvSpPr/>
-          <p:nvPr/>
-        </p:nvSpPr>
-        <p:spPr>
-          <a:xfrm rot="1690715">
-            <a:off x="11397243" y="699516"/>
-            <a:ext cx="290457" cy="18288"/>
-          </a:xfrm>
-          <a:prstGeom prst="rect">
-            <a:avLst/>
-          </a:prstGeom>
-          <a:solidFill>
-            <a:srgbClr val="1E2761"/>
-          </a:solidFill>
-          <a:ln/>
-        </p:spPr>
-      </p:sp>
-      <p:sp>
-        <p:nvSpPr>
-          <p:cNvPr id="7" name="Shape 5"/>
-          <p:cNvSpPr/>
-          <p:nvPr/>
-        </p:nvSpPr>
-        <p:spPr>
-          <a:xfrm>
-            <a:off x="11359591" y="585216"/>
-            <a:ext cx="109728" cy="109728"/>
-          </a:xfrm>
-          <a:prstGeom prst="ellipse">
-            <a:avLst/>
-          </a:prstGeom>
-          <a:solidFill>
-            <a:srgbClr val="1E2761"/>
-          </a:solidFill>
-          <a:ln/>
-        </p:spPr>
-      </p:sp>
-      <p:sp>
-        <p:nvSpPr>
-          <p:cNvPr id="8" name="Shape 6"/>
-          <p:cNvSpPr/>
-          <p:nvPr/>
-        </p:nvSpPr>
-        <p:spPr>
-          <a:xfrm>
-            <a:off x="11615623" y="448056"/>
-            <a:ext cx="109728" cy="109728"/>
-          </a:xfrm>
-          <a:prstGeom prst="ellipse">
-            <a:avLst/>
-          </a:prstGeom>
-          <a:solidFill>
-            <a:srgbClr val="E8574A"/>
-          </a:solidFill>
-          <a:ln/>
-        </p:spPr>
-      </p:sp>
-      <p:sp>
-        <p:nvSpPr>
-          <p:cNvPr id="9" name="Shape 7"/>
-          <p:cNvSpPr/>
-          <p:nvPr/>
-        </p:nvSpPr>
-        <p:spPr>
-          <a:xfrm>
-            <a:off x="11615623" y="722376"/>
-            <a:ext cx="109728" cy="109728"/>
-          </a:xfrm>
-          <a:prstGeom prst="ellipse">
-            <a:avLst/>
-          </a:prstGeom>
-          <a:solidFill>
-            <a:srgbClr val="2F9E63"/>
-          </a:solidFill>
-          <a:ln/>
-        </p:spPr>
-      </p:sp>
-      <p:sp>
-        <p:nvSpPr>
           <p:cNvPr id="10" name="Shape 8"/>
           <p:cNvSpPr/>
           <p:nvPr/>
@@ -13382,6 +14486,290 @@
               <a:ea typeface="Calibri" panose="020F0502020204030204" pitchFamily="34" charset="0"/>
               <a:cs typeface="Calibri" panose="020F0502020204030204" pitchFamily="34" charset="0"/>
             </a:endParaRPr>
+          </a:p>
+        </p:txBody>
+      </p:sp>
+      <p:cxnSp>
+        <p:nvCxnSpPr>
+          <p:cNvPr id="39" name="graph-edge-develops"/>
+          <p:cNvCxnSpPr/>
+          <p:nvPr/>
+        </p:nvCxnSpPr>
+        <p:spPr>
+          <a:xfrm>
+            <a:off x="11000232" y="530352"/>
+            <a:ext cx="219456" cy="0"/>
+          </a:xfrm>
+          <a:prstGeom prst="line">
+            <a:avLst/>
+          </a:prstGeom>
+          <a:ln w="12700">
+            <a:solidFill>
+              <a:srgbClr val="1E2761"/>
+            </a:solidFill>
+            <a:tailEnd type="triangle" w="sm" len="sm"/>
+          </a:ln>
+        </p:spPr>
+        <p:style>
+          <a:lnRef idx="2">
+            <a:schemeClr val="accent1"/>
+          </a:lnRef>
+          <a:fillRef idx="0">
+            <a:schemeClr val="accent1"/>
+          </a:fillRef>
+          <a:effectRef idx="1">
+            <a:schemeClr val="accent1"/>
+          </a:effectRef>
+          <a:fontRef idx="minor">
+            <a:schemeClr val="tx1"/>
+          </a:fontRef>
+        </p:style>
+      </p:cxnSp>
+      <p:cxnSp>
+        <p:nvCxnSpPr>
+          <p:cNvPr id="40" name="graph-edge-requires"/>
+          <p:cNvCxnSpPr/>
+          <p:nvPr/>
+        </p:nvCxnSpPr>
+        <p:spPr>
+          <a:xfrm flipH="1">
+            <a:off x="11365992" y="530352"/>
+            <a:ext cx="219456" cy="0"/>
+          </a:xfrm>
+          <a:prstGeom prst="line">
+            <a:avLst/>
+          </a:prstGeom>
+          <a:ln w="12700">
+            <a:solidFill>
+              <a:srgbClr val="2F9E63"/>
+            </a:solidFill>
+            <a:tailEnd type="triangle" w="sm" len="sm"/>
+          </a:ln>
+        </p:spPr>
+        <p:style>
+          <a:lnRef idx="2">
+            <a:schemeClr val="accent1"/>
+          </a:lnRef>
+          <a:fillRef idx="0">
+            <a:schemeClr val="accent1"/>
+          </a:fillRef>
+          <a:effectRef idx="1">
+            <a:schemeClr val="accent1"/>
+          </a:effectRef>
+          <a:fontRef idx="minor">
+            <a:schemeClr val="tx1"/>
+          </a:fontRef>
+        </p:style>
+      </p:cxnSp>
+      <p:cxnSp>
+        <p:nvCxnSpPr>
+          <p:cNvPr id="41" name="graph-edge-isa"/>
+          <p:cNvCxnSpPr/>
+          <p:nvPr/>
+        </p:nvCxnSpPr>
+        <p:spPr>
+          <a:xfrm flipV="1">
+            <a:off x="11292840" y="603503"/>
+            <a:ext cx="0" cy="146305"/>
+          </a:xfrm>
+          <a:prstGeom prst="line">
+            <a:avLst/>
+          </a:prstGeom>
+          <a:ln w="12700">
+            <a:solidFill>
+              <a:srgbClr val="9AA3B2"/>
+            </a:solidFill>
+            <a:tailEnd type="triangle" w="sm" len="sm"/>
+          </a:ln>
+        </p:spPr>
+        <p:style>
+          <a:lnRef idx="2">
+            <a:schemeClr val="accent1"/>
+          </a:lnRef>
+          <a:fillRef idx="0">
+            <a:schemeClr val="accent1"/>
+          </a:fillRef>
+          <a:effectRef idx="1">
+            <a:schemeClr val="accent1"/>
+          </a:effectRef>
+          <a:fontRef idx="minor">
+            <a:schemeClr val="tx1"/>
+          </a:fontRef>
+        </p:style>
+      </p:cxnSp>
+      <p:sp>
+        <p:nvSpPr>
+          <p:cNvPr id="42" name="graph-node-major"/>
+          <p:cNvSpPr/>
+          <p:nvPr/>
+        </p:nvSpPr>
+        <p:spPr>
+          <a:xfrm>
+            <a:off x="10872215" y="475488"/>
+            <a:ext cx="109728" cy="109728"/>
+          </a:xfrm>
+          <a:prstGeom prst="ellipse">
+            <a:avLst/>
+          </a:prstGeom>
+          <a:solidFill>
+            <a:srgbClr val="1E2761"/>
+          </a:solidFill>
+          <a:ln>
+            <a:noFill/>
+          </a:ln>
+          <a:effectLst/>
+        </p:spPr>
+        <p:style>
+          <a:lnRef idx="1">
+            <a:schemeClr val="accent1"/>
+          </a:lnRef>
+          <a:fillRef idx="3">
+            <a:schemeClr val="accent1"/>
+          </a:fillRef>
+          <a:effectRef idx="2">
+            <a:schemeClr val="accent1"/>
+          </a:effectRef>
+          <a:fontRef idx="minor">
+            <a:schemeClr val="lt1"/>
+          </a:fontRef>
+        </p:style>
+        <p:txBody>
+          <a:bodyPr rtlCol="0" anchor="ctr"/>
+          <a:lstStyle/>
+          <a:p>
+            <a:pPr algn="ctr"/>
+          </a:p>
+        </p:txBody>
+      </p:sp>
+      <p:sp>
+        <p:nvSpPr>
+          <p:cNvPr id="43" name="graph-node-skill"/>
+          <p:cNvSpPr/>
+          <p:nvPr/>
+        </p:nvSpPr>
+        <p:spPr>
+          <a:xfrm>
+            <a:off x="11237976" y="475488"/>
+            <a:ext cx="109728" cy="109728"/>
+          </a:xfrm>
+          <a:prstGeom prst="ellipse">
+            <a:avLst/>
+          </a:prstGeom>
+          <a:solidFill>
+            <a:srgbClr val="E8574A"/>
+          </a:solidFill>
+          <a:ln>
+            <a:noFill/>
+          </a:ln>
+          <a:effectLst/>
+        </p:spPr>
+        <p:style>
+          <a:lnRef idx="1">
+            <a:schemeClr val="accent1"/>
+          </a:lnRef>
+          <a:fillRef idx="3">
+            <a:schemeClr val="accent1"/>
+          </a:fillRef>
+          <a:effectRef idx="2">
+            <a:schemeClr val="accent1"/>
+          </a:effectRef>
+          <a:fontRef idx="minor">
+            <a:schemeClr val="lt1"/>
+          </a:fontRef>
+        </p:style>
+        <p:txBody>
+          <a:bodyPr rtlCol="0" anchor="ctr"/>
+          <a:lstStyle/>
+          <a:p>
+            <a:pPr algn="ctr"/>
+          </a:p>
+        </p:txBody>
+      </p:sp>
+      <p:sp>
+        <p:nvSpPr>
+          <p:cNvPr id="44" name="graph-node-job"/>
+          <p:cNvSpPr/>
+          <p:nvPr/>
+        </p:nvSpPr>
+        <p:spPr>
+          <a:xfrm>
+            <a:off x="11603736" y="475488"/>
+            <a:ext cx="109728" cy="109728"/>
+          </a:xfrm>
+          <a:prstGeom prst="ellipse">
+            <a:avLst/>
+          </a:prstGeom>
+          <a:solidFill>
+            <a:srgbClr val="2F9E63"/>
+          </a:solidFill>
+          <a:ln>
+            <a:noFill/>
+          </a:ln>
+          <a:effectLst/>
+        </p:spPr>
+        <p:style>
+          <a:lnRef idx="1">
+            <a:schemeClr val="accent1"/>
+          </a:lnRef>
+          <a:fillRef idx="3">
+            <a:schemeClr val="accent1"/>
+          </a:fillRef>
+          <a:effectRef idx="2">
+            <a:schemeClr val="accent1"/>
+          </a:effectRef>
+          <a:fontRef idx="minor">
+            <a:schemeClr val="lt1"/>
+          </a:fontRef>
+        </p:style>
+        <p:txBody>
+          <a:bodyPr rtlCol="0" anchor="ctr"/>
+          <a:lstStyle/>
+          <a:p>
+            <a:pPr algn="ctr"/>
+          </a:p>
+        </p:txBody>
+      </p:sp>
+      <p:sp>
+        <p:nvSpPr>
+          <p:cNvPr id="45" name="graph-node-skill-child"/>
+          <p:cNvSpPr/>
+          <p:nvPr/>
+        </p:nvSpPr>
+        <p:spPr>
+          <a:xfrm>
+            <a:off x="11254435" y="784555"/>
+            <a:ext cx="76809" cy="76809"/>
+          </a:xfrm>
+          <a:prstGeom prst="ellipse">
+            <a:avLst/>
+          </a:prstGeom>
+          <a:solidFill>
+            <a:srgbClr val="9AA3B2"/>
+          </a:solidFill>
+          <a:ln>
+            <a:noFill/>
+          </a:ln>
+          <a:effectLst/>
+        </p:spPr>
+        <p:style>
+          <a:lnRef idx="1">
+            <a:schemeClr val="accent1"/>
+          </a:lnRef>
+          <a:fillRef idx="3">
+            <a:schemeClr val="accent1"/>
+          </a:fillRef>
+          <a:effectRef idx="2">
+            <a:schemeClr val="accent1"/>
+          </a:effectRef>
+          <a:fontRef idx="minor">
+            <a:schemeClr val="lt1"/>
+          </a:fontRef>
+        </p:style>
+        <p:txBody>
+          <a:bodyPr rtlCol="0" anchor="ctr"/>
+          <a:lstStyle/>
+          <a:p>
+            <a:pPr algn="ctr"/>
           </a:p>
         </p:txBody>
       </p:sp>
@@ -13549,106 +14937,6 @@
       </p:sp>
       <p:sp>
         <p:nvSpPr>
-          <p:cNvPr id="5" name="Shape 3"/>
-          <p:cNvSpPr/>
-          <p:nvPr/>
-        </p:nvSpPr>
-        <p:spPr>
-          <a:xfrm rot="-1690715">
-            <a:off x="11397243" y="562356"/>
-            <a:ext cx="290457" cy="18288"/>
-          </a:xfrm>
-          <a:prstGeom prst="rect">
-            <a:avLst/>
-          </a:prstGeom>
-          <a:solidFill>
-            <a:srgbClr val="1E2761"/>
-          </a:solidFill>
-          <a:ln/>
-        </p:spPr>
-      </p:sp>
-      <p:sp>
-        <p:nvSpPr>
-          <p:cNvPr id="6" name="Shape 4"/>
-          <p:cNvSpPr/>
-          <p:nvPr/>
-        </p:nvSpPr>
-        <p:spPr>
-          <a:xfrm rot="1690715">
-            <a:off x="11397243" y="699516"/>
-            <a:ext cx="290457" cy="18288"/>
-          </a:xfrm>
-          <a:prstGeom prst="rect">
-            <a:avLst/>
-          </a:prstGeom>
-          <a:solidFill>
-            <a:srgbClr val="1E2761"/>
-          </a:solidFill>
-          <a:ln/>
-        </p:spPr>
-      </p:sp>
-      <p:sp>
-        <p:nvSpPr>
-          <p:cNvPr id="7" name="Shape 5"/>
-          <p:cNvSpPr/>
-          <p:nvPr/>
-        </p:nvSpPr>
-        <p:spPr>
-          <a:xfrm>
-            <a:off x="11359591" y="585216"/>
-            <a:ext cx="109728" cy="109728"/>
-          </a:xfrm>
-          <a:prstGeom prst="ellipse">
-            <a:avLst/>
-          </a:prstGeom>
-          <a:solidFill>
-            <a:srgbClr val="1E2761"/>
-          </a:solidFill>
-          <a:ln/>
-        </p:spPr>
-      </p:sp>
-      <p:sp>
-        <p:nvSpPr>
-          <p:cNvPr id="8" name="Shape 6"/>
-          <p:cNvSpPr/>
-          <p:nvPr/>
-        </p:nvSpPr>
-        <p:spPr>
-          <a:xfrm>
-            <a:off x="11615623" y="448056"/>
-            <a:ext cx="109728" cy="109728"/>
-          </a:xfrm>
-          <a:prstGeom prst="ellipse">
-            <a:avLst/>
-          </a:prstGeom>
-          <a:solidFill>
-            <a:srgbClr val="E8574A"/>
-          </a:solidFill>
-          <a:ln/>
-        </p:spPr>
-      </p:sp>
-      <p:sp>
-        <p:nvSpPr>
-          <p:cNvPr id="9" name="Shape 7"/>
-          <p:cNvSpPr/>
-          <p:nvPr/>
-        </p:nvSpPr>
-        <p:spPr>
-          <a:xfrm>
-            <a:off x="11615623" y="722376"/>
-            <a:ext cx="109728" cy="109728"/>
-          </a:xfrm>
-          <a:prstGeom prst="ellipse">
-            <a:avLst/>
-          </a:prstGeom>
-          <a:solidFill>
-            <a:srgbClr val="2F9E63"/>
-          </a:solidFill>
-          <a:ln/>
-        </p:spPr>
-      </p:sp>
-      <p:sp>
-        <p:nvSpPr>
           <p:cNvPr id="10" name="Shape 8"/>
           <p:cNvSpPr/>
           <p:nvPr/>
@@ -14918,6 +16206,290 @@
               <a:ea typeface="Calibri" panose="020F0502020204030204" pitchFamily="34" charset="0"/>
               <a:cs typeface="Calibri" panose="020F0502020204030204" pitchFamily="34" charset="0"/>
             </a:endParaRPr>
+          </a:p>
+        </p:txBody>
+      </p:sp>
+      <p:cxnSp>
+        <p:nvCxnSpPr>
+          <p:cNvPr id="48" name="graph-edge-develops"/>
+          <p:cNvCxnSpPr/>
+          <p:nvPr/>
+        </p:nvCxnSpPr>
+        <p:spPr>
+          <a:xfrm>
+            <a:off x="11000232" y="530352"/>
+            <a:ext cx="219456" cy="0"/>
+          </a:xfrm>
+          <a:prstGeom prst="line">
+            <a:avLst/>
+          </a:prstGeom>
+          <a:ln w="12700">
+            <a:solidFill>
+              <a:srgbClr val="1E2761"/>
+            </a:solidFill>
+            <a:tailEnd type="triangle" w="sm" len="sm"/>
+          </a:ln>
+        </p:spPr>
+        <p:style>
+          <a:lnRef idx="2">
+            <a:schemeClr val="accent1"/>
+          </a:lnRef>
+          <a:fillRef idx="0">
+            <a:schemeClr val="accent1"/>
+          </a:fillRef>
+          <a:effectRef idx="1">
+            <a:schemeClr val="accent1"/>
+          </a:effectRef>
+          <a:fontRef idx="minor">
+            <a:schemeClr val="tx1"/>
+          </a:fontRef>
+        </p:style>
+      </p:cxnSp>
+      <p:cxnSp>
+        <p:nvCxnSpPr>
+          <p:cNvPr id="49" name="graph-edge-requires"/>
+          <p:cNvCxnSpPr/>
+          <p:nvPr/>
+        </p:nvCxnSpPr>
+        <p:spPr>
+          <a:xfrm flipH="1">
+            <a:off x="11365992" y="530352"/>
+            <a:ext cx="219456" cy="0"/>
+          </a:xfrm>
+          <a:prstGeom prst="line">
+            <a:avLst/>
+          </a:prstGeom>
+          <a:ln w="12700">
+            <a:solidFill>
+              <a:srgbClr val="2F9E63"/>
+            </a:solidFill>
+            <a:tailEnd type="triangle" w="sm" len="sm"/>
+          </a:ln>
+        </p:spPr>
+        <p:style>
+          <a:lnRef idx="2">
+            <a:schemeClr val="accent1"/>
+          </a:lnRef>
+          <a:fillRef idx="0">
+            <a:schemeClr val="accent1"/>
+          </a:fillRef>
+          <a:effectRef idx="1">
+            <a:schemeClr val="accent1"/>
+          </a:effectRef>
+          <a:fontRef idx="minor">
+            <a:schemeClr val="tx1"/>
+          </a:fontRef>
+        </p:style>
+      </p:cxnSp>
+      <p:cxnSp>
+        <p:nvCxnSpPr>
+          <p:cNvPr id="50" name="graph-edge-isa"/>
+          <p:cNvCxnSpPr/>
+          <p:nvPr/>
+        </p:nvCxnSpPr>
+        <p:spPr>
+          <a:xfrm flipV="1">
+            <a:off x="11292840" y="603503"/>
+            <a:ext cx="0" cy="146305"/>
+          </a:xfrm>
+          <a:prstGeom prst="line">
+            <a:avLst/>
+          </a:prstGeom>
+          <a:ln w="12700">
+            <a:solidFill>
+              <a:srgbClr val="9AA3B2"/>
+            </a:solidFill>
+            <a:tailEnd type="triangle" w="sm" len="sm"/>
+          </a:ln>
+        </p:spPr>
+        <p:style>
+          <a:lnRef idx="2">
+            <a:schemeClr val="accent1"/>
+          </a:lnRef>
+          <a:fillRef idx="0">
+            <a:schemeClr val="accent1"/>
+          </a:fillRef>
+          <a:effectRef idx="1">
+            <a:schemeClr val="accent1"/>
+          </a:effectRef>
+          <a:fontRef idx="minor">
+            <a:schemeClr val="tx1"/>
+          </a:fontRef>
+        </p:style>
+      </p:cxnSp>
+      <p:sp>
+        <p:nvSpPr>
+          <p:cNvPr id="51" name="graph-node-major"/>
+          <p:cNvSpPr/>
+          <p:nvPr/>
+        </p:nvSpPr>
+        <p:spPr>
+          <a:xfrm>
+            <a:off x="10872215" y="475488"/>
+            <a:ext cx="109728" cy="109728"/>
+          </a:xfrm>
+          <a:prstGeom prst="ellipse">
+            <a:avLst/>
+          </a:prstGeom>
+          <a:solidFill>
+            <a:srgbClr val="1E2761"/>
+          </a:solidFill>
+          <a:ln>
+            <a:noFill/>
+          </a:ln>
+          <a:effectLst/>
+        </p:spPr>
+        <p:style>
+          <a:lnRef idx="1">
+            <a:schemeClr val="accent1"/>
+          </a:lnRef>
+          <a:fillRef idx="3">
+            <a:schemeClr val="accent1"/>
+          </a:fillRef>
+          <a:effectRef idx="2">
+            <a:schemeClr val="accent1"/>
+          </a:effectRef>
+          <a:fontRef idx="minor">
+            <a:schemeClr val="lt1"/>
+          </a:fontRef>
+        </p:style>
+        <p:txBody>
+          <a:bodyPr rtlCol="0" anchor="ctr"/>
+          <a:lstStyle/>
+          <a:p>
+            <a:pPr algn="ctr"/>
+          </a:p>
+        </p:txBody>
+      </p:sp>
+      <p:sp>
+        <p:nvSpPr>
+          <p:cNvPr id="52" name="graph-node-skill"/>
+          <p:cNvSpPr/>
+          <p:nvPr/>
+        </p:nvSpPr>
+        <p:spPr>
+          <a:xfrm>
+            <a:off x="11237976" y="475488"/>
+            <a:ext cx="109728" cy="109728"/>
+          </a:xfrm>
+          <a:prstGeom prst="ellipse">
+            <a:avLst/>
+          </a:prstGeom>
+          <a:solidFill>
+            <a:srgbClr val="E8574A"/>
+          </a:solidFill>
+          <a:ln>
+            <a:noFill/>
+          </a:ln>
+          <a:effectLst/>
+        </p:spPr>
+        <p:style>
+          <a:lnRef idx="1">
+            <a:schemeClr val="accent1"/>
+          </a:lnRef>
+          <a:fillRef idx="3">
+            <a:schemeClr val="accent1"/>
+          </a:fillRef>
+          <a:effectRef idx="2">
+            <a:schemeClr val="accent1"/>
+          </a:effectRef>
+          <a:fontRef idx="minor">
+            <a:schemeClr val="lt1"/>
+          </a:fontRef>
+        </p:style>
+        <p:txBody>
+          <a:bodyPr rtlCol="0" anchor="ctr"/>
+          <a:lstStyle/>
+          <a:p>
+            <a:pPr algn="ctr"/>
+          </a:p>
+        </p:txBody>
+      </p:sp>
+      <p:sp>
+        <p:nvSpPr>
+          <p:cNvPr id="53" name="graph-node-job"/>
+          <p:cNvSpPr/>
+          <p:nvPr/>
+        </p:nvSpPr>
+        <p:spPr>
+          <a:xfrm>
+            <a:off x="11603736" y="475488"/>
+            <a:ext cx="109728" cy="109728"/>
+          </a:xfrm>
+          <a:prstGeom prst="ellipse">
+            <a:avLst/>
+          </a:prstGeom>
+          <a:solidFill>
+            <a:srgbClr val="2F9E63"/>
+          </a:solidFill>
+          <a:ln>
+            <a:noFill/>
+          </a:ln>
+          <a:effectLst/>
+        </p:spPr>
+        <p:style>
+          <a:lnRef idx="1">
+            <a:schemeClr val="accent1"/>
+          </a:lnRef>
+          <a:fillRef idx="3">
+            <a:schemeClr val="accent1"/>
+          </a:fillRef>
+          <a:effectRef idx="2">
+            <a:schemeClr val="accent1"/>
+          </a:effectRef>
+          <a:fontRef idx="minor">
+            <a:schemeClr val="lt1"/>
+          </a:fontRef>
+        </p:style>
+        <p:txBody>
+          <a:bodyPr rtlCol="0" anchor="ctr"/>
+          <a:lstStyle/>
+          <a:p>
+            <a:pPr algn="ctr"/>
+          </a:p>
+        </p:txBody>
+      </p:sp>
+      <p:sp>
+        <p:nvSpPr>
+          <p:cNvPr id="54" name="graph-node-skill-child"/>
+          <p:cNvSpPr/>
+          <p:nvPr/>
+        </p:nvSpPr>
+        <p:spPr>
+          <a:xfrm>
+            <a:off x="11254435" y="784555"/>
+            <a:ext cx="76809" cy="76809"/>
+          </a:xfrm>
+          <a:prstGeom prst="ellipse">
+            <a:avLst/>
+          </a:prstGeom>
+          <a:solidFill>
+            <a:srgbClr val="9AA3B2"/>
+          </a:solidFill>
+          <a:ln>
+            <a:noFill/>
+          </a:ln>
+          <a:effectLst/>
+        </p:spPr>
+        <p:style>
+          <a:lnRef idx="1">
+            <a:schemeClr val="accent1"/>
+          </a:lnRef>
+          <a:fillRef idx="3">
+            <a:schemeClr val="accent1"/>
+          </a:fillRef>
+          <a:effectRef idx="2">
+            <a:schemeClr val="accent1"/>
+          </a:effectRef>
+          <a:fontRef idx="minor">
+            <a:schemeClr val="lt1"/>
+          </a:fontRef>
+        </p:style>
+        <p:txBody>
+          <a:bodyPr rtlCol="0" anchor="ctr"/>
+          <a:lstStyle/>
+          <a:p>
+            <a:pPr algn="ctr"/>
           </a:p>
         </p:txBody>
       </p:sp>
